--- a/docs/tema1/diapositivas/jdbc-puro.pptx
+++ b/docs/tema1/diapositivas/jdbc-puro.pptx
@@ -5,46 +5,47 @@
     <p:sldMasterId id="2147483648" r:id="rId1"/>
   </p:sldMasterIdLst>
   <p:notesMasterIdLst>
-    <p:notesMasterId r:id="rId39"/>
+    <p:notesMasterId r:id="rId40"/>
   </p:notesMasterIdLst>
   <p:sldIdLst>
     <p:sldId id="256" r:id="rId2"/>
     <p:sldId id="257" r:id="rId3"/>
     <p:sldId id="258" r:id="rId4"/>
-    <p:sldId id="259" r:id="rId5"/>
-    <p:sldId id="260" r:id="rId6"/>
-    <p:sldId id="261" r:id="rId7"/>
-    <p:sldId id="262" r:id="rId8"/>
-    <p:sldId id="263" r:id="rId9"/>
-    <p:sldId id="264" r:id="rId10"/>
-    <p:sldId id="265" r:id="rId11"/>
-    <p:sldId id="266" r:id="rId12"/>
-    <p:sldId id="267" r:id="rId13"/>
-    <p:sldId id="268" r:id="rId14"/>
-    <p:sldId id="269" r:id="rId15"/>
-    <p:sldId id="270" r:id="rId16"/>
-    <p:sldId id="271" r:id="rId17"/>
-    <p:sldId id="272" r:id="rId18"/>
-    <p:sldId id="273" r:id="rId19"/>
-    <p:sldId id="274" r:id="rId20"/>
-    <p:sldId id="275" r:id="rId21"/>
-    <p:sldId id="276" r:id="rId22"/>
-    <p:sldId id="277" r:id="rId23"/>
-    <p:sldId id="278" r:id="rId24"/>
-    <p:sldId id="279" r:id="rId25"/>
-    <p:sldId id="280" r:id="rId26"/>
-    <p:sldId id="281" r:id="rId27"/>
-    <p:sldId id="282" r:id="rId28"/>
-    <p:sldId id="283" r:id="rId29"/>
-    <p:sldId id="284" r:id="rId30"/>
-    <p:sldId id="285" r:id="rId31"/>
-    <p:sldId id="286" r:id="rId32"/>
-    <p:sldId id="287" r:id="rId33"/>
-    <p:sldId id="288" r:id="rId34"/>
-    <p:sldId id="289" r:id="rId35"/>
-    <p:sldId id="290" r:id="rId36"/>
-    <p:sldId id="291" r:id="rId37"/>
-    <p:sldId id="292" r:id="rId38"/>
+    <p:sldId id="293" r:id="rId5"/>
+    <p:sldId id="259" r:id="rId6"/>
+    <p:sldId id="260" r:id="rId7"/>
+    <p:sldId id="261" r:id="rId8"/>
+    <p:sldId id="262" r:id="rId9"/>
+    <p:sldId id="263" r:id="rId10"/>
+    <p:sldId id="264" r:id="rId11"/>
+    <p:sldId id="265" r:id="rId12"/>
+    <p:sldId id="266" r:id="rId13"/>
+    <p:sldId id="267" r:id="rId14"/>
+    <p:sldId id="268" r:id="rId15"/>
+    <p:sldId id="269" r:id="rId16"/>
+    <p:sldId id="270" r:id="rId17"/>
+    <p:sldId id="271" r:id="rId18"/>
+    <p:sldId id="272" r:id="rId19"/>
+    <p:sldId id="273" r:id="rId20"/>
+    <p:sldId id="274" r:id="rId21"/>
+    <p:sldId id="275" r:id="rId22"/>
+    <p:sldId id="276" r:id="rId23"/>
+    <p:sldId id="277" r:id="rId24"/>
+    <p:sldId id="278" r:id="rId25"/>
+    <p:sldId id="279" r:id="rId26"/>
+    <p:sldId id="280" r:id="rId27"/>
+    <p:sldId id="281" r:id="rId28"/>
+    <p:sldId id="282" r:id="rId29"/>
+    <p:sldId id="283" r:id="rId30"/>
+    <p:sldId id="284" r:id="rId31"/>
+    <p:sldId id="285" r:id="rId32"/>
+    <p:sldId id="286" r:id="rId33"/>
+    <p:sldId id="287" r:id="rId34"/>
+    <p:sldId id="288" r:id="rId35"/>
+    <p:sldId id="289" r:id="rId36"/>
+    <p:sldId id="290" r:id="rId37"/>
+    <p:sldId id="291" r:id="rId38"/>
+    <p:sldId id="292" r:id="rId39"/>
   </p:sldIdLst>
   <p:sldSz cx="12192000" cy="6858000"/>
   <p:notesSz cx="6858000" cy="12192000"/>
@@ -2877,7 +2878,7 @@
 </p:notes>
 </file>
 
-<file path=ppt/notesSlides/notesSlide4.xml><?xml version="1.0" encoding="utf-8"?>
+<file path=ppt/notesSlides/notesSlide38.xml><?xml version="1.0" encoding="utf-8"?>
 <p:notes xmlns:a="http://schemas.openxmlformats.org/drawingml/2006/main" xmlns:r="http://schemas.openxmlformats.org/officeDocument/2006/relationships" xmlns:p="http://schemas.openxmlformats.org/presentationml/2006/main">
   <p:cSld>
     <p:spTree>
@@ -2942,7 +2943,7 @@
           <a:p>
             <a:fld id="{F7021451-1387-4CA6-816F-3879F97B5CBC}" type="slidenum">
               <a:rPr lang="en-US"/>
-              <a:t>4</a:t>
+              <a:t>38</a:t>
             </a:fld>
             <a:endParaRPr lang="en-US"/>
           </a:p>
@@ -2952,6 +2953,114 @@
     <p:extLst>
       <p:ext uri="{BB962C8B-B14F-4D97-AF65-F5344CB8AC3E}">
         <p14:creationId xmlns:p14="http://schemas.microsoft.com/office/powerpoint/2010/main" val="1024086991"/>
+      </p:ext>
+    </p:extLst>
+  </p:cSld>
+  <p:clrMapOvr>
+    <a:masterClrMapping/>
+  </p:clrMapOvr>
+</p:notes>
+</file>
+
+<file path=ppt/notesSlides/notesSlide4.xml><?xml version="1.0" encoding="utf-8"?>
+<p:notes xmlns:a="http://schemas.openxmlformats.org/drawingml/2006/main" xmlns:r="http://schemas.openxmlformats.org/officeDocument/2006/relationships" xmlns:p="http://schemas.openxmlformats.org/presentationml/2006/main">
+  <p:cSld>
+    <p:spTree>
+      <p:nvGrpSpPr>
+        <p:cNvPr id="1" name="">
+          <a:extLst>
+            <a:ext uri="{FF2B5EF4-FFF2-40B4-BE49-F238E27FC236}">
+              <a16:creationId xmlns:a16="http://schemas.microsoft.com/office/drawing/2014/main" id="{E7BDF16D-EE5D-50E6-64D2-1B21650FAF8F}"/>
+            </a:ext>
+          </a:extLst>
+        </p:cNvPr>
+        <p:cNvGrpSpPr/>
+        <p:nvPr/>
+      </p:nvGrpSpPr>
+      <p:grpSpPr>
+        <a:xfrm>
+          <a:off x="0" y="0"/>
+          <a:ext cx="0" cy="0"/>
+          <a:chOff x="0" y="0"/>
+          <a:chExt cx="0" cy="0"/>
+        </a:xfrm>
+      </p:grpSpPr>
+      <p:sp>
+        <p:nvSpPr>
+          <p:cNvPr id="2" name="Slide Image Placeholder 1">
+            <a:extLst>
+              <a:ext uri="{FF2B5EF4-FFF2-40B4-BE49-F238E27FC236}">
+                <a16:creationId xmlns:a16="http://schemas.microsoft.com/office/drawing/2014/main" id="{AEEF4C5D-A9C6-BF86-9471-7BFA8ED12CA5}"/>
+              </a:ext>
+            </a:extLst>
+          </p:cNvPr>
+          <p:cNvSpPr>
+            <a:spLocks noGrp="1" noRot="1" noChangeAspect="1"/>
+          </p:cNvSpPr>
+          <p:nvPr>
+            <p:ph type="sldImg"/>
+          </p:nvPr>
+        </p:nvSpPr>
+        <p:spPr/>
+      </p:sp>
+      <p:sp>
+        <p:nvSpPr>
+          <p:cNvPr id="3" name="Notes Placeholder 2">
+            <a:extLst>
+              <a:ext uri="{FF2B5EF4-FFF2-40B4-BE49-F238E27FC236}">
+                <a16:creationId xmlns:a16="http://schemas.microsoft.com/office/drawing/2014/main" id="{6FB16B68-4B02-F5BE-8AC2-9179243C1F9F}"/>
+              </a:ext>
+            </a:extLst>
+          </p:cNvPr>
+          <p:cNvSpPr>
+            <a:spLocks noGrp="1"/>
+          </p:cNvSpPr>
+          <p:nvPr>
+            <p:ph type="body" idx="1"/>
+          </p:nvPr>
+        </p:nvSpPr>
+        <p:spPr/>
+        <p:txBody>
+          <a:bodyPr/>
+          <a:lstStyle/>
+          <a:p>
+            <a:endParaRPr lang="en-US" dirty="0"/>
+          </a:p>
+        </p:txBody>
+      </p:sp>
+      <p:sp>
+        <p:nvSpPr>
+          <p:cNvPr id="4" name="Slide Number Placeholder 3">
+            <a:extLst>
+              <a:ext uri="{FF2B5EF4-FFF2-40B4-BE49-F238E27FC236}">
+                <a16:creationId xmlns:a16="http://schemas.microsoft.com/office/drawing/2014/main" id="{92D447DC-5259-E280-7E96-175C47915BB2}"/>
+              </a:ext>
+            </a:extLst>
+          </p:cNvPr>
+          <p:cNvSpPr>
+            <a:spLocks noGrp="1"/>
+          </p:cNvSpPr>
+          <p:nvPr>
+            <p:ph type="sldNum" sz="quarter" idx="10"/>
+          </p:nvPr>
+        </p:nvSpPr>
+        <p:spPr/>
+        <p:txBody>
+          <a:bodyPr/>
+          <a:lstStyle/>
+          <a:p>
+            <a:fld id="{F7021451-1387-4CA6-816F-3879F97B5CBC}" type="slidenum">
+              <a:rPr lang="en-US"/>
+              <a:t>4</a:t>
+            </a:fld>
+            <a:endParaRPr lang="en-US"/>
+          </a:p>
+        </p:txBody>
+      </p:sp>
+    </p:spTree>
+    <p:extLst>
+      <p:ext uri="{BB962C8B-B14F-4D97-AF65-F5344CB8AC3E}">
+        <p14:creationId xmlns:p14="http://schemas.microsoft.com/office/powerpoint/2010/main" val="3176368111"/>
       </p:ext>
     </p:extLst>
   </p:cSld>
@@ -3894,6 +4003,551 @@
 
 <file path=ppt/slides/slide10.xml><?xml version="1.0" encoding="utf-8"?>
 <p:sld xmlns:a="http://schemas.openxmlformats.org/drawingml/2006/main" xmlns:r="http://schemas.openxmlformats.org/officeDocument/2006/relationships" xmlns:p="http://schemas.openxmlformats.org/presentationml/2006/main">
+  <p:cSld name="Slide 9">
+    <p:spTree>
+      <p:nvGrpSpPr>
+        <p:cNvPr id="1" name=""/>
+        <p:cNvGrpSpPr/>
+        <p:nvPr/>
+      </p:nvGrpSpPr>
+      <p:grpSpPr>
+        <a:xfrm>
+          <a:off x="0" y="0"/>
+          <a:ext cx="0" cy="0"/>
+          <a:chOff x="0" y="0"/>
+          <a:chExt cx="0" cy="0"/>
+        </a:xfrm>
+      </p:grpSpPr>
+      <p:sp>
+        <p:nvSpPr>
+          <p:cNvPr id="2" name="Shape 0"/>
+          <p:cNvSpPr/>
+          <p:nvPr/>
+        </p:nvSpPr>
+        <p:spPr>
+          <a:xfrm>
+            <a:off x="0" y="0"/>
+            <a:ext cx="12188952" cy="777240"/>
+          </a:xfrm>
+          <a:prstGeom prst="rect">
+            <a:avLst/>
+          </a:prstGeom>
+          <a:solidFill>
+            <a:srgbClr val="7F0000"/>
+          </a:solidFill>
+          <a:ln w="12700">
+            <a:solidFill>
+              <a:srgbClr val="7F0000"/>
+            </a:solidFill>
+            <a:prstDash val="solid"/>
+          </a:ln>
+        </p:spPr>
+        <p:txBody>
+          <a:bodyPr/>
+          <a:lstStyle/>
+          <a:p>
+            <a:endParaRPr lang="es-ES"/>
+          </a:p>
+        </p:txBody>
+      </p:sp>
+      <p:sp>
+        <p:nvSpPr>
+          <p:cNvPr id="3" name="Text 1"/>
+          <p:cNvSpPr/>
+          <p:nvPr/>
+        </p:nvSpPr>
+        <p:spPr>
+          <a:xfrm>
+            <a:off x="365760" y="0"/>
+            <a:ext cx="11457432" cy="777240"/>
+          </a:xfrm>
+          <a:prstGeom prst="rect">
+            <a:avLst/>
+          </a:prstGeom>
+          <a:noFill/>
+          <a:ln/>
+        </p:spPr>
+        <p:txBody>
+          <a:bodyPr wrap="square" rtlCol="0" anchor="ctr"/>
+          <a:lstStyle/>
+          <a:p>
+            <a:pPr marL="0" indent="0">
+              <a:buNone/>
+            </a:pPr>
+            <a:r>
+              <a:rPr lang="en-US" sz="2600" b="1" dirty="0">
+                <a:solidFill>
+                  <a:srgbClr val="FFFFFF"/>
+                </a:solidFill>
+                <a:latin typeface="Arial" pitchFamily="34" charset="0"/>
+                <a:ea typeface="Arial" pitchFamily="34" charset="-122"/>
+                <a:cs typeface="Arial" pitchFamily="34" charset="-120"/>
+              </a:rPr>
+              <a:t>Con JDBC puro (lo que vas a hacer hoy)</a:t>
+            </a:r>
+            <a:endParaRPr lang="en-US" sz="2600" dirty="0"/>
+          </a:p>
+        </p:txBody>
+      </p:sp>
+      <p:sp>
+        <p:nvSpPr>
+          <p:cNvPr id="4" name="Text 2"/>
+          <p:cNvSpPr/>
+          <p:nvPr/>
+        </p:nvSpPr>
+        <p:spPr>
+          <a:xfrm>
+            <a:off x="548640" y="6473952"/>
+            <a:ext cx="11091672" cy="292608"/>
+          </a:xfrm>
+          <a:prstGeom prst="rect">
+            <a:avLst/>
+          </a:prstGeom>
+          <a:noFill/>
+          <a:ln/>
+        </p:spPr>
+        <p:txBody>
+          <a:bodyPr wrap="square" rtlCol="0" anchor="ctr"/>
+          <a:lstStyle/>
+          <a:p>
+            <a:pPr marL="0" indent="0" algn="r">
+              <a:buNone/>
+            </a:pPr>
+            <a:r>
+              <a:rPr lang="en-US" sz="1100" dirty="0">
+                <a:solidFill>
+                  <a:srgbClr val="757575"/>
+                </a:solidFill>
+                <a:latin typeface="Arial" pitchFamily="34" charset="0"/>
+                <a:ea typeface="Arial" pitchFamily="34" charset="-122"/>
+                <a:cs typeface="Arial" pitchFamily="34" charset="-120"/>
+              </a:rPr>
+              <a:t>Acceso a Datos — Tema 1: JDBC puro</a:t>
+            </a:r>
+            <a:endParaRPr lang="en-US" sz="1100" dirty="0"/>
+          </a:p>
+        </p:txBody>
+      </p:sp>
+      <p:sp>
+        <p:nvSpPr>
+          <p:cNvPr id="5" name="Shape 3"/>
+          <p:cNvSpPr/>
+          <p:nvPr/>
+        </p:nvSpPr>
+        <p:spPr>
+          <a:xfrm>
+            <a:off x="548640" y="1234439"/>
+            <a:ext cx="11091672" cy="5054393"/>
+          </a:xfrm>
+          <a:prstGeom prst="rect">
+            <a:avLst/>
+          </a:prstGeom>
+          <a:solidFill>
+            <a:srgbClr val="ECEFF1"/>
+          </a:solidFill>
+          <a:ln w="12700">
+            <a:solidFill>
+              <a:srgbClr val="EEEEEE"/>
+            </a:solidFill>
+            <a:prstDash val="solid"/>
+          </a:ln>
+        </p:spPr>
+        <p:txBody>
+          <a:bodyPr/>
+          <a:lstStyle/>
+          <a:p>
+            <a:endParaRPr lang="es-ES"/>
+          </a:p>
+        </p:txBody>
+      </p:sp>
+      <p:sp>
+        <p:nvSpPr>
+          <p:cNvPr id="6" name="Shape 4"/>
+          <p:cNvSpPr/>
+          <p:nvPr/>
+        </p:nvSpPr>
+        <p:spPr>
+          <a:xfrm>
+            <a:off x="548640" y="1234440"/>
+            <a:ext cx="73152" cy="5054392"/>
+          </a:xfrm>
+          <a:prstGeom prst="rect">
+            <a:avLst/>
+          </a:prstGeom>
+          <a:solidFill>
+            <a:srgbClr val="E64A19"/>
+          </a:solidFill>
+          <a:ln w="12700">
+            <a:solidFill>
+              <a:srgbClr val="E64A19"/>
+            </a:solidFill>
+            <a:prstDash val="solid"/>
+          </a:ln>
+        </p:spPr>
+        <p:txBody>
+          <a:bodyPr/>
+          <a:lstStyle/>
+          <a:p>
+            <a:endParaRPr lang="es-ES"/>
+          </a:p>
+        </p:txBody>
+      </p:sp>
+      <p:sp>
+        <p:nvSpPr>
+          <p:cNvPr id="7" name="Text 5"/>
+          <p:cNvSpPr/>
+          <p:nvPr/>
+        </p:nvSpPr>
+        <p:spPr>
+          <a:xfrm>
+            <a:off x="822960" y="1344168"/>
+            <a:ext cx="10588752" cy="4626864"/>
+          </a:xfrm>
+          <a:prstGeom prst="rect">
+            <a:avLst/>
+          </a:prstGeom>
+          <a:noFill/>
+          <a:ln/>
+        </p:spPr>
+        <p:txBody>
+          <a:bodyPr wrap="square" rtlCol="0" anchor="t"/>
+          <a:lstStyle/>
+          <a:p>
+            <a:pPr marL="0" indent="0">
+              <a:buNone/>
+            </a:pPr>
+            <a:r>
+              <a:rPr lang="en-US" sz="1500" dirty="0">
+                <a:solidFill>
+                  <a:srgbClr val="263238"/>
+                </a:solidFill>
+                <a:latin typeface="Courier New" pitchFamily="34" charset="0"/>
+                <a:ea typeface="Courier New" pitchFamily="34" charset="-122"/>
+                <a:cs typeface="Courier New" pitchFamily="34" charset="-120"/>
+              </a:rPr>
+              <a:t>String sql = "SELECT id, titulo, precio FROM libro WHERE editorial_id = ?";</a:t>
+            </a:r>
+            <a:endParaRPr lang="en-US" sz="1500" dirty="0"/>
+          </a:p>
+          <a:p>
+            <a:pPr marL="0" indent="0">
+              <a:buNone/>
+            </a:pPr>
+            <a:endParaRPr lang="en-US" sz="1500" dirty="0"/>
+          </a:p>
+          <a:p>
+            <a:pPr marL="0" indent="0">
+              <a:buNone/>
+            </a:pPr>
+            <a:r>
+              <a:rPr lang="en-US" sz="1500" dirty="0">
+                <a:solidFill>
+                  <a:srgbClr val="263238"/>
+                </a:solidFill>
+                <a:latin typeface="Courier New" pitchFamily="34" charset="0"/>
+                <a:ea typeface="Courier New" pitchFamily="34" charset="-122"/>
+                <a:cs typeface="Courier New" pitchFamily="34" charset="-120"/>
+              </a:rPr>
+              <a:t>try (Connection conn = DriverManager.getConnection(url, user, pass);</a:t>
+            </a:r>
+            <a:endParaRPr lang="en-US" sz="1500" dirty="0"/>
+          </a:p>
+          <a:p>
+            <a:pPr marL="0" indent="0">
+              <a:buNone/>
+            </a:pPr>
+            <a:r>
+              <a:rPr lang="en-US" sz="1500" dirty="0">
+                <a:solidFill>
+                  <a:srgbClr val="263238"/>
+                </a:solidFill>
+                <a:latin typeface="Courier New" pitchFamily="34" charset="0"/>
+                <a:ea typeface="Courier New" pitchFamily="34" charset="-122"/>
+                <a:cs typeface="Courier New" pitchFamily="34" charset="-120"/>
+              </a:rPr>
+              <a:t>     PreparedStatement stmt = conn.prepareStatement(sql)) {</a:t>
+            </a:r>
+            <a:endParaRPr lang="en-US" sz="1500" dirty="0"/>
+          </a:p>
+          <a:p>
+            <a:pPr marL="0" indent="0">
+              <a:buNone/>
+            </a:pPr>
+            <a:endParaRPr lang="en-US" sz="1500" dirty="0"/>
+          </a:p>
+          <a:p>
+            <a:pPr marL="0" indent="0">
+              <a:buNone/>
+            </a:pPr>
+            <a:r>
+              <a:rPr lang="en-US" sz="1500" dirty="0">
+                <a:solidFill>
+                  <a:srgbClr val="263238"/>
+                </a:solidFill>
+                <a:latin typeface="Courier New" pitchFamily="34" charset="0"/>
+                <a:ea typeface="Courier New" pitchFamily="34" charset="-122"/>
+                <a:cs typeface="Courier New" pitchFamily="34" charset="-120"/>
+              </a:rPr>
+              <a:t>    stmt.setLong(1, editorialId);</a:t>
+            </a:r>
+            <a:endParaRPr lang="en-US" sz="1500" dirty="0"/>
+          </a:p>
+          <a:p>
+            <a:pPr marL="0" indent="0">
+              <a:buNone/>
+            </a:pPr>
+            <a:endParaRPr lang="en-US" sz="1500" dirty="0"/>
+          </a:p>
+          <a:p>
+            <a:pPr marL="0" indent="0">
+              <a:buNone/>
+            </a:pPr>
+            <a:r>
+              <a:rPr lang="en-US" sz="1500" dirty="0">
+                <a:solidFill>
+                  <a:srgbClr val="263238"/>
+                </a:solidFill>
+                <a:latin typeface="Courier New" pitchFamily="34" charset="0"/>
+                <a:ea typeface="Courier New" pitchFamily="34" charset="-122"/>
+                <a:cs typeface="Courier New" pitchFamily="34" charset="-120"/>
+              </a:rPr>
+              <a:t>    try (ResultSet rs = stmt.executeQuery()) {</a:t>
+            </a:r>
+            <a:endParaRPr lang="en-US" sz="1500" dirty="0"/>
+          </a:p>
+          <a:p>
+            <a:pPr marL="0" indent="0">
+              <a:buNone/>
+            </a:pPr>
+            <a:r>
+              <a:rPr lang="en-US" sz="1500" dirty="0">
+                <a:solidFill>
+                  <a:srgbClr val="263238"/>
+                </a:solidFill>
+                <a:latin typeface="Courier New" pitchFamily="34" charset="0"/>
+                <a:ea typeface="Courier New" pitchFamily="34" charset="-122"/>
+                <a:cs typeface="Courier New" pitchFamily="34" charset="-120"/>
+              </a:rPr>
+              <a:t>        List&lt;Libro&gt; libros = new ArrayList&lt;&gt;();</a:t>
+            </a:r>
+            <a:endParaRPr lang="en-US" sz="1500" dirty="0"/>
+          </a:p>
+          <a:p>
+            <a:pPr marL="0" indent="0">
+              <a:buNone/>
+            </a:pPr>
+            <a:r>
+              <a:rPr lang="en-US" sz="1500" dirty="0">
+                <a:solidFill>
+                  <a:srgbClr val="263238"/>
+                </a:solidFill>
+                <a:latin typeface="Courier New" pitchFamily="34" charset="0"/>
+                <a:ea typeface="Courier New" pitchFamily="34" charset="-122"/>
+                <a:cs typeface="Courier New" pitchFamily="34" charset="-120"/>
+              </a:rPr>
+              <a:t>        while (rs.next()) {</a:t>
+            </a:r>
+            <a:endParaRPr lang="en-US" sz="1500" dirty="0"/>
+          </a:p>
+          <a:p>
+            <a:pPr marL="0" indent="0">
+              <a:buNone/>
+            </a:pPr>
+            <a:r>
+              <a:rPr lang="en-US" sz="1500" dirty="0">
+                <a:solidFill>
+                  <a:srgbClr val="263238"/>
+                </a:solidFill>
+                <a:latin typeface="Courier New" pitchFamily="34" charset="0"/>
+                <a:ea typeface="Courier New" pitchFamily="34" charset="-122"/>
+                <a:cs typeface="Courier New" pitchFamily="34" charset="-120"/>
+              </a:rPr>
+              <a:t>            Libro libro = new Libro();</a:t>
+            </a:r>
+            <a:endParaRPr lang="en-US" sz="1500" dirty="0"/>
+          </a:p>
+          <a:p>
+            <a:pPr marL="0" indent="0">
+              <a:buNone/>
+            </a:pPr>
+            <a:r>
+              <a:rPr lang="en-US" sz="1500" dirty="0">
+                <a:solidFill>
+                  <a:srgbClr val="263238"/>
+                </a:solidFill>
+                <a:latin typeface="Courier New" pitchFamily="34" charset="0"/>
+                <a:ea typeface="Courier New" pitchFamily="34" charset="-122"/>
+                <a:cs typeface="Courier New" pitchFamily="34" charset="-120"/>
+              </a:rPr>
+              <a:t>            libro.setId(rs.getLong("id"));</a:t>
+            </a:r>
+            <a:endParaRPr lang="en-US" sz="1500" dirty="0"/>
+          </a:p>
+          <a:p>
+            <a:pPr marL="0" indent="0">
+              <a:buNone/>
+            </a:pPr>
+            <a:r>
+              <a:rPr lang="en-US" sz="1500" dirty="0">
+                <a:solidFill>
+                  <a:srgbClr val="263238"/>
+                </a:solidFill>
+                <a:latin typeface="Courier New" pitchFamily="34" charset="0"/>
+                <a:ea typeface="Courier New" pitchFamily="34" charset="-122"/>
+                <a:cs typeface="Courier New" pitchFamily="34" charset="-120"/>
+              </a:rPr>
+              <a:t>            libro.setTitulo(rs.getString("titulo"));</a:t>
+            </a:r>
+            <a:endParaRPr lang="en-US" sz="1500" dirty="0"/>
+          </a:p>
+          <a:p>
+            <a:pPr marL="0" indent="0">
+              <a:buNone/>
+            </a:pPr>
+            <a:r>
+              <a:rPr lang="en-US" sz="1500" dirty="0">
+                <a:solidFill>
+                  <a:srgbClr val="263238"/>
+                </a:solidFill>
+                <a:latin typeface="Courier New" pitchFamily="34" charset="0"/>
+                <a:ea typeface="Courier New" pitchFamily="34" charset="-122"/>
+                <a:cs typeface="Courier New" pitchFamily="34" charset="-120"/>
+              </a:rPr>
+              <a:t>            libro.setPrecio(rs.getBigDecimal("precio"));</a:t>
+            </a:r>
+            <a:endParaRPr lang="en-US" sz="1500" dirty="0"/>
+          </a:p>
+          <a:p>
+            <a:pPr marL="0" indent="0">
+              <a:buNone/>
+            </a:pPr>
+            <a:r>
+              <a:rPr lang="en-US" sz="1500" dirty="0">
+                <a:solidFill>
+                  <a:srgbClr val="263238"/>
+                </a:solidFill>
+                <a:latin typeface="Courier New" pitchFamily="34" charset="0"/>
+                <a:ea typeface="Courier New" pitchFamily="34" charset="-122"/>
+                <a:cs typeface="Courier New" pitchFamily="34" charset="-120"/>
+              </a:rPr>
+              <a:t>            libros.add(libro);</a:t>
+            </a:r>
+            <a:endParaRPr lang="en-US" sz="1500" dirty="0"/>
+          </a:p>
+          <a:p>
+            <a:pPr marL="0" indent="0">
+              <a:buNone/>
+            </a:pPr>
+            <a:r>
+              <a:rPr lang="en-US" sz="1500" dirty="0">
+                <a:solidFill>
+                  <a:srgbClr val="263238"/>
+                </a:solidFill>
+                <a:latin typeface="Courier New" pitchFamily="34" charset="0"/>
+                <a:ea typeface="Courier New" pitchFamily="34" charset="-122"/>
+                <a:cs typeface="Courier New" pitchFamily="34" charset="-120"/>
+              </a:rPr>
+              <a:t>        }</a:t>
+            </a:r>
+            <a:endParaRPr lang="en-US" sz="1500" dirty="0"/>
+          </a:p>
+          <a:p>
+            <a:pPr marL="0" indent="0">
+              <a:buNone/>
+            </a:pPr>
+            <a:r>
+              <a:rPr lang="en-US" sz="1500" dirty="0">
+                <a:solidFill>
+                  <a:srgbClr val="263238"/>
+                </a:solidFill>
+                <a:latin typeface="Courier New" pitchFamily="34" charset="0"/>
+                <a:ea typeface="Courier New" pitchFamily="34" charset="-122"/>
+                <a:cs typeface="Courier New" pitchFamily="34" charset="-120"/>
+              </a:rPr>
+              <a:t>        return libros;</a:t>
+            </a:r>
+            <a:endParaRPr lang="en-US" sz="1500" dirty="0"/>
+          </a:p>
+          <a:p>
+            <a:pPr marL="0" indent="0">
+              <a:buNone/>
+            </a:pPr>
+            <a:r>
+              <a:rPr lang="en-US" sz="1500" dirty="0">
+                <a:solidFill>
+                  <a:srgbClr val="263238"/>
+                </a:solidFill>
+                <a:latin typeface="Courier New" pitchFamily="34" charset="0"/>
+                <a:ea typeface="Courier New" pitchFamily="34" charset="-122"/>
+                <a:cs typeface="Courier New" pitchFamily="34" charset="-120"/>
+              </a:rPr>
+              <a:t>    }</a:t>
+            </a:r>
+            <a:endParaRPr lang="en-US" sz="1500" dirty="0"/>
+          </a:p>
+          <a:p>
+            <a:pPr marL="0" indent="0">
+              <a:buNone/>
+            </a:pPr>
+            <a:r>
+              <a:rPr lang="en-US" sz="1500" dirty="0">
+                <a:solidFill>
+                  <a:srgbClr val="263238"/>
+                </a:solidFill>
+                <a:latin typeface="Courier New" pitchFamily="34" charset="0"/>
+                <a:ea typeface="Courier New" pitchFamily="34" charset="-122"/>
+                <a:cs typeface="Courier New" pitchFamily="34" charset="-120"/>
+              </a:rPr>
+              <a:t>} catch (SQLException e) {</a:t>
+            </a:r>
+            <a:endParaRPr lang="en-US" sz="1500" dirty="0"/>
+          </a:p>
+          <a:p>
+            <a:pPr marL="0" indent="0">
+              <a:buNone/>
+            </a:pPr>
+            <a:r>
+              <a:rPr lang="en-US" sz="1500" dirty="0">
+                <a:solidFill>
+                  <a:srgbClr val="263238"/>
+                </a:solidFill>
+                <a:latin typeface="Courier New" pitchFamily="34" charset="0"/>
+                <a:ea typeface="Courier New" pitchFamily="34" charset="-122"/>
+                <a:cs typeface="Courier New" pitchFamily="34" charset="-120"/>
+              </a:rPr>
+              <a:t>    throw new RuntimeException("Error accediendo a la base de datos", e);</a:t>
+            </a:r>
+            <a:endParaRPr lang="en-US" sz="1500" dirty="0"/>
+          </a:p>
+          <a:p>
+            <a:pPr marL="0" indent="0">
+              <a:buNone/>
+            </a:pPr>
+            <a:r>
+              <a:rPr lang="en-US" sz="1500" dirty="0">
+                <a:solidFill>
+                  <a:srgbClr val="263238"/>
+                </a:solidFill>
+                <a:latin typeface="Courier New" pitchFamily="34" charset="0"/>
+                <a:ea typeface="Courier New" pitchFamily="34" charset="-122"/>
+                <a:cs typeface="Courier New" pitchFamily="34" charset="-120"/>
+              </a:rPr>
+              <a:t>}</a:t>
+            </a:r>
+            <a:endParaRPr lang="en-US" sz="1500" dirty="0"/>
+          </a:p>
+        </p:txBody>
+      </p:sp>
+    </p:spTree>
+  </p:cSld>
+  <p:clrMapOvr>
+    <a:masterClrMapping/>
+  </p:clrMapOvr>
+</p:sld>
+</file>
+
+<file path=ppt/slides/slide11.xml><?xml version="1.0" encoding="utf-8"?>
+<p:sld xmlns:a="http://schemas.openxmlformats.org/drawingml/2006/main" xmlns:r="http://schemas.openxmlformats.org/officeDocument/2006/relationships" xmlns:p="http://schemas.openxmlformats.org/presentationml/2006/main">
   <p:cSld name="Slide 10">
     <p:spTree>
       <p:nvGrpSpPr>
@@ -4098,7 +4752,7 @@
 </p:sld>
 </file>
 
-<file path=ppt/slides/slide11.xml><?xml version="1.0" encoding="utf-8"?>
+<file path=ppt/slides/slide12.xml><?xml version="1.0" encoding="utf-8"?>
 <p:sld xmlns:a="http://schemas.openxmlformats.org/drawingml/2006/main" xmlns:r="http://schemas.openxmlformats.org/officeDocument/2006/relationships" xmlns:p="http://schemas.openxmlformats.org/presentationml/2006/main">
   <p:cSld name="Slide 11">
     <p:spTree>
@@ -4702,7 +5356,7 @@
 </p:sld>
 </file>
 
-<file path=ppt/slides/slide12.xml><?xml version="1.0" encoding="utf-8"?>
+<file path=ppt/slides/slide13.xml><?xml version="1.0" encoding="utf-8"?>
 <p:sld xmlns:a="http://schemas.openxmlformats.org/drawingml/2006/main" xmlns:r="http://schemas.openxmlformats.org/officeDocument/2006/relationships" xmlns:p="http://schemas.openxmlformats.org/presentationml/2006/main">
   <p:cSld name="Slide 12">
     <p:spTree>
@@ -5047,7 +5701,7 @@
 </p:sld>
 </file>
 
-<file path=ppt/slides/slide13.xml><?xml version="1.0" encoding="utf-8"?>
+<file path=ppt/slides/slide14.xml><?xml version="1.0" encoding="utf-8"?>
 <p:sld xmlns:a="http://schemas.openxmlformats.org/drawingml/2006/main" xmlns:r="http://schemas.openxmlformats.org/officeDocument/2006/relationships" xmlns:p="http://schemas.openxmlformats.org/presentationml/2006/main">
   <p:cSld name="Slide 13">
     <p:spTree>
@@ -5292,7 +5946,7 @@
 </p:sld>
 </file>
 
-<file path=ppt/slides/slide14.xml><?xml version="1.0" encoding="utf-8"?>
+<file path=ppt/slides/slide15.xml><?xml version="1.0" encoding="utf-8"?>
 <p:sld xmlns:a="http://schemas.openxmlformats.org/drawingml/2006/main" xmlns:r="http://schemas.openxmlformats.org/officeDocument/2006/relationships" xmlns:p="http://schemas.openxmlformats.org/presentationml/2006/main">
   <p:cSld name="Slide 14">
     <p:spTree>
@@ -5603,7 +6257,7 @@
 </p:sld>
 </file>
 
-<file path=ppt/slides/slide15.xml><?xml version="1.0" encoding="utf-8"?>
+<file path=ppt/slides/slide16.xml><?xml version="1.0" encoding="utf-8"?>
 <p:sld xmlns:a="http://schemas.openxmlformats.org/drawingml/2006/main" xmlns:r="http://schemas.openxmlformats.org/officeDocument/2006/relationships" xmlns:p="http://schemas.openxmlformats.org/presentationml/2006/main">
   <p:cSld name="Slide 15">
     <p:spTree>
@@ -5866,7 +6520,7 @@
 </p:sld>
 </file>
 
-<file path=ppt/slides/slide16.xml><?xml version="1.0" encoding="utf-8"?>
+<file path=ppt/slides/slide17.xml><?xml version="1.0" encoding="utf-8"?>
 <p:sld xmlns:a="http://schemas.openxmlformats.org/drawingml/2006/main" xmlns:r="http://schemas.openxmlformats.org/officeDocument/2006/relationships" xmlns:p="http://schemas.openxmlformats.org/presentationml/2006/main">
   <p:cSld name="Slide 16">
     <p:spTree>
@@ -6245,7 +6899,7 @@
 </p:sld>
 </file>
 
-<file path=ppt/slides/slide17.xml><?xml version="1.0" encoding="utf-8"?>
+<file path=ppt/slides/slide18.xml><?xml version="1.0" encoding="utf-8"?>
 <p:sld xmlns:a="http://schemas.openxmlformats.org/drawingml/2006/main" xmlns:r="http://schemas.openxmlformats.org/officeDocument/2006/relationships" xmlns:p="http://schemas.openxmlformats.org/presentationml/2006/main">
   <p:cSld name="Slide 17">
     <p:spTree>
@@ -6451,7 +7105,7 @@
 </p:sld>
 </file>
 
-<file path=ppt/slides/slide18.xml><?xml version="1.0" encoding="utf-8"?>
+<file path=ppt/slides/slide19.xml><?xml version="1.0" encoding="utf-8"?>
 <p:sld xmlns:a="http://schemas.openxmlformats.org/drawingml/2006/main" xmlns:r="http://schemas.openxmlformats.org/officeDocument/2006/relationships" xmlns:p="http://schemas.openxmlformats.org/presentationml/2006/main">
   <p:cSld name="Slide 18">
     <p:spTree>
@@ -6859,251 +7513,6 @@
               <a:t>}</a:t>
             </a:r>
             <a:endParaRPr lang="en-US" sz="1600" dirty="0"/>
-          </a:p>
-        </p:txBody>
-      </p:sp>
-    </p:spTree>
-  </p:cSld>
-  <p:clrMapOvr>
-    <a:masterClrMapping/>
-  </p:clrMapOvr>
-</p:sld>
-</file>
-
-<file path=ppt/slides/slide19.xml><?xml version="1.0" encoding="utf-8"?>
-<p:sld xmlns:a="http://schemas.openxmlformats.org/drawingml/2006/main" xmlns:r="http://schemas.openxmlformats.org/officeDocument/2006/relationships" xmlns:p="http://schemas.openxmlformats.org/presentationml/2006/main">
-  <p:cSld name="Slide 19">
-    <p:spTree>
-      <p:nvGrpSpPr>
-        <p:cNvPr id="1" name=""/>
-        <p:cNvGrpSpPr/>
-        <p:nvPr/>
-      </p:nvGrpSpPr>
-      <p:grpSpPr>
-        <a:xfrm>
-          <a:off x="0" y="0"/>
-          <a:ext cx="0" cy="0"/>
-          <a:chOff x="0" y="0"/>
-          <a:chExt cx="0" cy="0"/>
-        </a:xfrm>
-      </p:grpSpPr>
-      <p:sp>
-        <p:nvSpPr>
-          <p:cNvPr id="2" name="Shape 0"/>
-          <p:cNvSpPr/>
-          <p:nvPr/>
-        </p:nvSpPr>
-        <p:spPr>
-          <a:xfrm>
-            <a:off x="0" y="0"/>
-            <a:ext cx="12188952" cy="777240"/>
-          </a:xfrm>
-          <a:prstGeom prst="rect">
-            <a:avLst/>
-          </a:prstGeom>
-          <a:solidFill>
-            <a:srgbClr val="7F0000"/>
-          </a:solidFill>
-          <a:ln w="12700">
-            <a:solidFill>
-              <a:srgbClr val="7F0000"/>
-            </a:solidFill>
-            <a:prstDash val="solid"/>
-          </a:ln>
-        </p:spPr>
-        <p:txBody>
-          <a:bodyPr/>
-          <a:lstStyle/>
-          <a:p>
-            <a:endParaRPr lang="es-ES"/>
-          </a:p>
-        </p:txBody>
-      </p:sp>
-      <p:sp>
-        <p:nvSpPr>
-          <p:cNvPr id="3" name="Text 1"/>
-          <p:cNvSpPr/>
-          <p:nvPr/>
-        </p:nvSpPr>
-        <p:spPr>
-          <a:xfrm>
-            <a:off x="365760" y="0"/>
-            <a:ext cx="11457432" cy="777240"/>
-          </a:xfrm>
-          <a:prstGeom prst="rect">
-            <a:avLst/>
-          </a:prstGeom>
-          <a:noFill/>
-          <a:ln/>
-        </p:spPr>
-        <p:txBody>
-          <a:bodyPr wrap="square" rtlCol="0" anchor="ctr"/>
-          <a:lstStyle/>
-          <a:p>
-            <a:pPr marL="0" indent="0">
-              <a:buNone/>
-            </a:pPr>
-            <a:r>
-              <a:rPr lang="en-US" sz="2600" b="1" dirty="0">
-                <a:solidFill>
-                  <a:srgbClr val="FFFFFF"/>
-                </a:solidFill>
-                <a:latin typeface="Arial" pitchFamily="34" charset="0"/>
-                <a:ea typeface="Arial" pitchFamily="34" charset="-122"/>
-                <a:cs typeface="Arial" pitchFamily="34" charset="-120"/>
-              </a:rPr>
-              <a:t>Paso 4 (cont.) — qué pasa si no cierras</a:t>
-            </a:r>
-            <a:endParaRPr lang="en-US" sz="2600" dirty="0"/>
-          </a:p>
-        </p:txBody>
-      </p:sp>
-      <p:sp>
-        <p:nvSpPr>
-          <p:cNvPr id="4" name="Text 2"/>
-          <p:cNvSpPr/>
-          <p:nvPr/>
-        </p:nvSpPr>
-        <p:spPr>
-          <a:xfrm>
-            <a:off x="548640" y="6473952"/>
-            <a:ext cx="11091672" cy="292608"/>
-          </a:xfrm>
-          <a:prstGeom prst="rect">
-            <a:avLst/>
-          </a:prstGeom>
-          <a:noFill/>
-          <a:ln/>
-        </p:spPr>
-        <p:txBody>
-          <a:bodyPr wrap="square" rtlCol="0" anchor="ctr"/>
-          <a:lstStyle/>
-          <a:p>
-            <a:pPr marL="0" indent="0" algn="r">
-              <a:buNone/>
-            </a:pPr>
-            <a:r>
-              <a:rPr lang="en-US" sz="1100" dirty="0">
-                <a:solidFill>
-                  <a:srgbClr val="757575"/>
-                </a:solidFill>
-                <a:latin typeface="Arial" pitchFamily="34" charset="0"/>
-                <a:ea typeface="Arial" pitchFamily="34" charset="-122"/>
-                <a:cs typeface="Arial" pitchFamily="34" charset="-120"/>
-              </a:rPr>
-              <a:t>Acceso a Datos — Tema 1: JDBC puro</a:t>
-            </a:r>
-            <a:endParaRPr lang="en-US" sz="1100" dirty="0"/>
-          </a:p>
-        </p:txBody>
-      </p:sp>
-      <p:sp>
-        <p:nvSpPr>
-          <p:cNvPr id="5" name="Text 3"/>
-          <p:cNvSpPr/>
-          <p:nvPr/>
-        </p:nvSpPr>
-        <p:spPr>
-          <a:xfrm>
-            <a:off x="548640" y="2240280"/>
-            <a:ext cx="11091672" cy="1691640"/>
-          </a:xfrm>
-          <a:prstGeom prst="rect">
-            <a:avLst/>
-          </a:prstGeom>
-          <a:noFill/>
-          <a:ln/>
-        </p:spPr>
-        <p:txBody>
-          <a:bodyPr wrap="square" rtlCol="0" anchor="t"/>
-          <a:lstStyle/>
-          <a:p>
-            <a:pPr marL="0" indent="0">
-              <a:buNone/>
-            </a:pPr>
-            <a:r>
-              <a:rPr lang="en-US" sz="2000" dirty="0">
-                <a:solidFill>
-                  <a:srgbClr val="212121"/>
-                </a:solidFill>
-                <a:latin typeface="Arial" pitchFamily="34" charset="0"/>
-                <a:ea typeface="Arial" pitchFamily="34" charset="-122"/>
-                <a:cs typeface="Arial" pitchFamily="34" charset="-120"/>
-              </a:rPr>
-              <a:t>En este ejemplo, cada Connection se ha abierto directamente mediante DriverManager. Si olvidas cerrarla, la sesión con PostgreSQL permanece ocupada y sigue consumiendo recursos. Si el problema se repite muchas veces, la base de datos puede alcanzar su límite de conexiones y dejar de aceptar nuevas peticiones.</a:t>
-            </a:r>
-            <a:endParaRPr lang="en-US" sz="2000" dirty="0"/>
-          </a:p>
-        </p:txBody>
-      </p:sp>
-      <p:sp>
-        <p:nvSpPr>
-          <p:cNvPr id="6" name="Shape 4"/>
-          <p:cNvSpPr/>
-          <p:nvPr/>
-        </p:nvSpPr>
-        <p:spPr>
-          <a:xfrm>
-            <a:off x="548640" y="4297680"/>
-            <a:ext cx="11091672" cy="960120"/>
-          </a:xfrm>
-          <a:prstGeom prst="roundRect">
-            <a:avLst/>
-          </a:prstGeom>
-          <a:solidFill>
-            <a:srgbClr val="FBE9E7"/>
-          </a:solidFill>
-          <a:ln w="19050">
-            <a:solidFill>
-              <a:srgbClr val="E64A19"/>
-            </a:solidFill>
-            <a:prstDash val="solid"/>
-          </a:ln>
-        </p:spPr>
-        <p:txBody>
-          <a:bodyPr/>
-          <a:lstStyle/>
-          <a:p>
-            <a:endParaRPr lang="es-ES"/>
-          </a:p>
-        </p:txBody>
-      </p:sp>
-      <p:sp>
-        <p:nvSpPr>
-          <p:cNvPr id="7" name="Text 5"/>
-          <p:cNvSpPr/>
-          <p:nvPr/>
-        </p:nvSpPr>
-        <p:spPr>
-          <a:xfrm>
-            <a:off x="822960" y="4389120"/>
-            <a:ext cx="10543032" cy="777240"/>
-          </a:xfrm>
-          <a:prstGeom prst="rect">
-            <a:avLst/>
-          </a:prstGeom>
-          <a:noFill/>
-          <a:ln/>
-        </p:spPr>
-        <p:txBody>
-          <a:bodyPr wrap="square" rtlCol="0" anchor="ctr"/>
-          <a:lstStyle/>
-          <a:p>
-            <a:pPr marL="0" indent="0">
-              <a:buNone/>
-            </a:pPr>
-            <a:r>
-              <a:rPr lang="en-US" sz="1900" dirty="0">
-                <a:solidFill>
-                  <a:srgbClr val="212121"/>
-                </a:solidFill>
-                <a:latin typeface="Arial" pitchFamily="34" charset="0"/>
-                <a:ea typeface="Arial" pitchFamily="34" charset="-122"/>
-                <a:cs typeface="Arial" pitchFamily="34" charset="-120"/>
-              </a:rPr>
-              <a:t>Cerrar correctamente los recursos no es, por tanto, una tarea opcional: forma parte del funcionamiento básico de cualquier operación JDBC.</a:t>
-            </a:r>
-            <a:endParaRPr lang="en-US" sz="1900" dirty="0"/>
           </a:p>
         </p:txBody>
       </p:sp>
@@ -7362,6 +7771,251 @@
 
 <file path=ppt/slides/slide20.xml><?xml version="1.0" encoding="utf-8"?>
 <p:sld xmlns:a="http://schemas.openxmlformats.org/drawingml/2006/main" xmlns:r="http://schemas.openxmlformats.org/officeDocument/2006/relationships" xmlns:p="http://schemas.openxmlformats.org/presentationml/2006/main">
+  <p:cSld name="Slide 19">
+    <p:spTree>
+      <p:nvGrpSpPr>
+        <p:cNvPr id="1" name=""/>
+        <p:cNvGrpSpPr/>
+        <p:nvPr/>
+      </p:nvGrpSpPr>
+      <p:grpSpPr>
+        <a:xfrm>
+          <a:off x="0" y="0"/>
+          <a:ext cx="0" cy="0"/>
+          <a:chOff x="0" y="0"/>
+          <a:chExt cx="0" cy="0"/>
+        </a:xfrm>
+      </p:grpSpPr>
+      <p:sp>
+        <p:nvSpPr>
+          <p:cNvPr id="2" name="Shape 0"/>
+          <p:cNvSpPr/>
+          <p:nvPr/>
+        </p:nvSpPr>
+        <p:spPr>
+          <a:xfrm>
+            <a:off x="0" y="0"/>
+            <a:ext cx="12188952" cy="777240"/>
+          </a:xfrm>
+          <a:prstGeom prst="rect">
+            <a:avLst/>
+          </a:prstGeom>
+          <a:solidFill>
+            <a:srgbClr val="7F0000"/>
+          </a:solidFill>
+          <a:ln w="12700">
+            <a:solidFill>
+              <a:srgbClr val="7F0000"/>
+            </a:solidFill>
+            <a:prstDash val="solid"/>
+          </a:ln>
+        </p:spPr>
+        <p:txBody>
+          <a:bodyPr/>
+          <a:lstStyle/>
+          <a:p>
+            <a:endParaRPr lang="es-ES"/>
+          </a:p>
+        </p:txBody>
+      </p:sp>
+      <p:sp>
+        <p:nvSpPr>
+          <p:cNvPr id="3" name="Text 1"/>
+          <p:cNvSpPr/>
+          <p:nvPr/>
+        </p:nvSpPr>
+        <p:spPr>
+          <a:xfrm>
+            <a:off x="365760" y="0"/>
+            <a:ext cx="11457432" cy="777240"/>
+          </a:xfrm>
+          <a:prstGeom prst="rect">
+            <a:avLst/>
+          </a:prstGeom>
+          <a:noFill/>
+          <a:ln/>
+        </p:spPr>
+        <p:txBody>
+          <a:bodyPr wrap="square" rtlCol="0" anchor="ctr"/>
+          <a:lstStyle/>
+          <a:p>
+            <a:pPr marL="0" indent="0">
+              <a:buNone/>
+            </a:pPr>
+            <a:r>
+              <a:rPr lang="en-US" sz="2600" b="1" dirty="0">
+                <a:solidFill>
+                  <a:srgbClr val="FFFFFF"/>
+                </a:solidFill>
+                <a:latin typeface="Arial" pitchFamily="34" charset="0"/>
+                <a:ea typeface="Arial" pitchFamily="34" charset="-122"/>
+                <a:cs typeface="Arial" pitchFamily="34" charset="-120"/>
+              </a:rPr>
+              <a:t>Paso 4 (cont.) — qué pasa si no cierras</a:t>
+            </a:r>
+            <a:endParaRPr lang="en-US" sz="2600" dirty="0"/>
+          </a:p>
+        </p:txBody>
+      </p:sp>
+      <p:sp>
+        <p:nvSpPr>
+          <p:cNvPr id="4" name="Text 2"/>
+          <p:cNvSpPr/>
+          <p:nvPr/>
+        </p:nvSpPr>
+        <p:spPr>
+          <a:xfrm>
+            <a:off x="548640" y="6473952"/>
+            <a:ext cx="11091672" cy="292608"/>
+          </a:xfrm>
+          <a:prstGeom prst="rect">
+            <a:avLst/>
+          </a:prstGeom>
+          <a:noFill/>
+          <a:ln/>
+        </p:spPr>
+        <p:txBody>
+          <a:bodyPr wrap="square" rtlCol="0" anchor="ctr"/>
+          <a:lstStyle/>
+          <a:p>
+            <a:pPr marL="0" indent="0" algn="r">
+              <a:buNone/>
+            </a:pPr>
+            <a:r>
+              <a:rPr lang="en-US" sz="1100" dirty="0">
+                <a:solidFill>
+                  <a:srgbClr val="757575"/>
+                </a:solidFill>
+                <a:latin typeface="Arial" pitchFamily="34" charset="0"/>
+                <a:ea typeface="Arial" pitchFamily="34" charset="-122"/>
+                <a:cs typeface="Arial" pitchFamily="34" charset="-120"/>
+              </a:rPr>
+              <a:t>Acceso a Datos — Tema 1: JDBC puro</a:t>
+            </a:r>
+            <a:endParaRPr lang="en-US" sz="1100" dirty="0"/>
+          </a:p>
+        </p:txBody>
+      </p:sp>
+      <p:sp>
+        <p:nvSpPr>
+          <p:cNvPr id="5" name="Text 3"/>
+          <p:cNvSpPr/>
+          <p:nvPr/>
+        </p:nvSpPr>
+        <p:spPr>
+          <a:xfrm>
+            <a:off x="548640" y="2240280"/>
+            <a:ext cx="11091672" cy="1691640"/>
+          </a:xfrm>
+          <a:prstGeom prst="rect">
+            <a:avLst/>
+          </a:prstGeom>
+          <a:noFill/>
+          <a:ln/>
+        </p:spPr>
+        <p:txBody>
+          <a:bodyPr wrap="square" rtlCol="0" anchor="t"/>
+          <a:lstStyle/>
+          <a:p>
+            <a:pPr marL="0" indent="0">
+              <a:buNone/>
+            </a:pPr>
+            <a:r>
+              <a:rPr lang="en-US" sz="2000" dirty="0">
+                <a:solidFill>
+                  <a:srgbClr val="212121"/>
+                </a:solidFill>
+                <a:latin typeface="Arial" pitchFamily="34" charset="0"/>
+                <a:ea typeface="Arial" pitchFamily="34" charset="-122"/>
+                <a:cs typeface="Arial" pitchFamily="34" charset="-120"/>
+              </a:rPr>
+              <a:t>En este ejemplo, cada Connection se ha abierto directamente mediante DriverManager. Si olvidas cerrarla, la sesión con PostgreSQL permanece ocupada y sigue consumiendo recursos. Si el problema se repite muchas veces, la base de datos puede alcanzar su límite de conexiones y dejar de aceptar nuevas peticiones.</a:t>
+            </a:r>
+            <a:endParaRPr lang="en-US" sz="2000" dirty="0"/>
+          </a:p>
+        </p:txBody>
+      </p:sp>
+      <p:sp>
+        <p:nvSpPr>
+          <p:cNvPr id="6" name="Shape 4"/>
+          <p:cNvSpPr/>
+          <p:nvPr/>
+        </p:nvSpPr>
+        <p:spPr>
+          <a:xfrm>
+            <a:off x="548640" y="4297680"/>
+            <a:ext cx="11091672" cy="960120"/>
+          </a:xfrm>
+          <a:prstGeom prst="roundRect">
+            <a:avLst/>
+          </a:prstGeom>
+          <a:solidFill>
+            <a:srgbClr val="FBE9E7"/>
+          </a:solidFill>
+          <a:ln w="19050">
+            <a:solidFill>
+              <a:srgbClr val="E64A19"/>
+            </a:solidFill>
+            <a:prstDash val="solid"/>
+          </a:ln>
+        </p:spPr>
+        <p:txBody>
+          <a:bodyPr/>
+          <a:lstStyle/>
+          <a:p>
+            <a:endParaRPr lang="es-ES"/>
+          </a:p>
+        </p:txBody>
+      </p:sp>
+      <p:sp>
+        <p:nvSpPr>
+          <p:cNvPr id="7" name="Text 5"/>
+          <p:cNvSpPr/>
+          <p:nvPr/>
+        </p:nvSpPr>
+        <p:spPr>
+          <a:xfrm>
+            <a:off x="822960" y="4389120"/>
+            <a:ext cx="10543032" cy="777240"/>
+          </a:xfrm>
+          <a:prstGeom prst="rect">
+            <a:avLst/>
+          </a:prstGeom>
+          <a:noFill/>
+          <a:ln/>
+        </p:spPr>
+        <p:txBody>
+          <a:bodyPr wrap="square" rtlCol="0" anchor="ctr"/>
+          <a:lstStyle/>
+          <a:p>
+            <a:pPr marL="0" indent="0">
+              <a:buNone/>
+            </a:pPr>
+            <a:r>
+              <a:rPr lang="en-US" sz="1900" dirty="0">
+                <a:solidFill>
+                  <a:srgbClr val="212121"/>
+                </a:solidFill>
+                <a:latin typeface="Arial" pitchFamily="34" charset="0"/>
+                <a:ea typeface="Arial" pitchFamily="34" charset="-122"/>
+                <a:cs typeface="Arial" pitchFamily="34" charset="-120"/>
+              </a:rPr>
+              <a:t>Cerrar correctamente los recursos no es, por tanto, una tarea opcional: forma parte del funcionamiento básico de cualquier operación JDBC.</a:t>
+            </a:r>
+            <a:endParaRPr lang="en-US" sz="1900" dirty="0"/>
+          </a:p>
+        </p:txBody>
+      </p:sp>
+    </p:spTree>
+  </p:cSld>
+  <p:clrMapOvr>
+    <a:masterClrMapping/>
+  </p:clrMapOvr>
+</p:sld>
+</file>
+
+<file path=ppt/slides/slide21.xml><?xml version="1.0" encoding="utf-8"?>
+<p:sld xmlns:a="http://schemas.openxmlformats.org/drawingml/2006/main" xmlns:r="http://schemas.openxmlformats.org/officeDocument/2006/relationships" xmlns:p="http://schemas.openxmlformats.org/presentationml/2006/main">
   <p:cSld name="Slide 20">
     <p:spTree>
       <p:nvGrpSpPr>
@@ -7534,7 +8188,7 @@
 </p:sld>
 </file>
 
-<file path=ppt/slides/slide21.xml><?xml version="1.0" encoding="utf-8"?>
+<file path=ppt/slides/slide22.xml><?xml version="1.0" encoding="utf-8"?>
 <p:sld xmlns:a="http://schemas.openxmlformats.org/drawingml/2006/main" xmlns:r="http://schemas.openxmlformats.org/officeDocument/2006/relationships" xmlns:p="http://schemas.openxmlformats.org/presentationml/2006/main">
   <p:cSld name="Slide 21">
     <p:spTree>
@@ -7828,7 +8482,7 @@
 </p:sld>
 </file>
 
-<file path=ppt/slides/slide22.xml><?xml version="1.0" encoding="utf-8"?>
+<file path=ppt/slides/slide23.xml><?xml version="1.0" encoding="utf-8"?>
 <p:sld xmlns:a="http://schemas.openxmlformats.org/drawingml/2006/main" xmlns:r="http://schemas.openxmlformats.org/officeDocument/2006/relationships" xmlns:p="http://schemas.openxmlformats.org/presentationml/2006/main">
   <p:cSld name="Slide 22">
     <p:spTree>
@@ -8288,7 +8942,7 @@
 </p:sld>
 </file>
 
-<file path=ppt/slides/slide23.xml><?xml version="1.0" encoding="utf-8"?>
+<file path=ppt/slides/slide24.xml><?xml version="1.0" encoding="utf-8"?>
 <p:sld xmlns:a="http://schemas.openxmlformats.org/drawingml/2006/main" xmlns:r="http://schemas.openxmlformats.org/officeDocument/2006/relationships" xmlns:p="http://schemas.openxmlformats.org/presentationml/2006/main">
   <p:cSld name="Slide 23">
     <p:spTree>
@@ -8533,7 +9187,7 @@
 </p:sld>
 </file>
 
-<file path=ppt/slides/slide24.xml><?xml version="1.0" encoding="utf-8"?>
+<file path=ppt/slides/slide25.xml><?xml version="1.0" encoding="utf-8"?>
 <p:sld xmlns:a="http://schemas.openxmlformats.org/drawingml/2006/main" xmlns:r="http://schemas.openxmlformats.org/officeDocument/2006/relationships" xmlns:p="http://schemas.openxmlformats.org/presentationml/2006/main">
   <p:cSld name="Slide 24">
     <p:spTree>
@@ -8817,7 +9471,7 @@
 </p:sld>
 </file>
 
-<file path=ppt/slides/slide25.xml><?xml version="1.0" encoding="utf-8"?>
+<file path=ppt/slides/slide26.xml><?xml version="1.0" encoding="utf-8"?>
 <p:sld xmlns:a="http://schemas.openxmlformats.org/drawingml/2006/main" xmlns:r="http://schemas.openxmlformats.org/officeDocument/2006/relationships" xmlns:p="http://schemas.openxmlformats.org/presentationml/2006/main">
   <p:cSld name="Slide 25">
     <p:spTree>
@@ -9094,7 +9748,7 @@
 </p:sld>
 </file>
 
-<file path=ppt/slides/slide26.xml><?xml version="1.0" encoding="utf-8"?>
+<file path=ppt/slides/slide27.xml><?xml version="1.0" encoding="utf-8"?>
 <p:sld xmlns:a="http://schemas.openxmlformats.org/drawingml/2006/main" xmlns:r="http://schemas.openxmlformats.org/officeDocument/2006/relationships" xmlns:p="http://schemas.openxmlformats.org/presentationml/2006/main">
   <p:cSld name="Slide 26">
     <p:spTree>
@@ -9503,7 +10157,7 @@
 </p:sld>
 </file>
 
-<file path=ppt/slides/slide27.xml><?xml version="1.0" encoding="utf-8"?>
+<file path=ppt/slides/slide28.xml><?xml version="1.0" encoding="utf-8"?>
 <p:sld xmlns:a="http://schemas.openxmlformats.org/drawingml/2006/main" xmlns:r="http://schemas.openxmlformats.org/officeDocument/2006/relationships" xmlns:p="http://schemas.openxmlformats.org/presentationml/2006/main">
   <p:cSld name="Slide 27">
     <p:spTree>
@@ -9974,7 +10628,7 @@
 </p:sld>
 </file>
 
-<file path=ppt/slides/slide28.xml><?xml version="1.0" encoding="utf-8"?>
+<file path=ppt/slides/slide29.xml><?xml version="1.0" encoding="utf-8"?>
 <p:sld xmlns:a="http://schemas.openxmlformats.org/drawingml/2006/main" xmlns:r="http://schemas.openxmlformats.org/officeDocument/2006/relationships" xmlns:p="http://schemas.openxmlformats.org/presentationml/2006/main">
   <p:cSld name="Slide 28">
     <p:spTree>
@@ -10207,165 +10861,6 @@
           </a:p>
         </p:txBody>
       </p:sp>
-    </p:spTree>
-  </p:cSld>
-  <p:clrMapOvr>
-    <a:masterClrMapping/>
-  </p:clrMapOvr>
-</p:sld>
-</file>
-
-<file path=ppt/slides/slide29.xml><?xml version="1.0" encoding="utf-8"?>
-<p:sld xmlns:a="http://schemas.openxmlformats.org/drawingml/2006/main" xmlns:r="http://schemas.openxmlformats.org/officeDocument/2006/relationships" xmlns:p="http://schemas.openxmlformats.org/presentationml/2006/main">
-  <p:cSld name="Slide 29">
-    <p:spTree>
-      <p:nvGrpSpPr>
-        <p:cNvPr id="1" name=""/>
-        <p:cNvGrpSpPr/>
-        <p:nvPr/>
-      </p:nvGrpSpPr>
-      <p:grpSpPr>
-        <a:xfrm>
-          <a:off x="0" y="0"/>
-          <a:ext cx="0" cy="0"/>
-          <a:chOff x="0" y="0"/>
-          <a:chExt cx="0" cy="0"/>
-        </a:xfrm>
-      </p:grpSpPr>
-      <p:sp>
-        <p:nvSpPr>
-          <p:cNvPr id="2" name="Shape 0"/>
-          <p:cNvSpPr/>
-          <p:nvPr/>
-        </p:nvSpPr>
-        <p:spPr>
-          <a:xfrm>
-            <a:off x="0" y="0"/>
-            <a:ext cx="12188952" cy="777240"/>
-          </a:xfrm>
-          <a:prstGeom prst="rect">
-            <a:avLst/>
-          </a:prstGeom>
-          <a:solidFill>
-            <a:srgbClr val="7F0000"/>
-          </a:solidFill>
-          <a:ln w="12700">
-            <a:solidFill>
-              <a:srgbClr val="7F0000"/>
-            </a:solidFill>
-            <a:prstDash val="solid"/>
-          </a:ln>
-        </p:spPr>
-        <p:txBody>
-          <a:bodyPr/>
-          <a:lstStyle/>
-          <a:p>
-            <a:endParaRPr lang="es-ES"/>
-          </a:p>
-        </p:txBody>
-      </p:sp>
-      <p:sp>
-        <p:nvSpPr>
-          <p:cNvPr id="3" name="Text 1"/>
-          <p:cNvSpPr/>
-          <p:nvPr/>
-        </p:nvSpPr>
-        <p:spPr>
-          <a:xfrm>
-            <a:off x="365760" y="0"/>
-            <a:ext cx="11457432" cy="777240"/>
-          </a:xfrm>
-          <a:prstGeom prst="rect">
-            <a:avLst/>
-          </a:prstGeom>
-          <a:noFill/>
-          <a:ln/>
-        </p:spPr>
-        <p:txBody>
-          <a:bodyPr wrap="square" rtlCol="0" anchor="ctr"/>
-          <a:lstStyle/>
-          <a:p>
-            <a:pPr marL="0" indent="0">
-              <a:buNone/>
-            </a:pPr>
-            <a:r>
-              <a:rPr lang="en-US" sz="2600" b="1" dirty="0">
-                <a:solidFill>
-                  <a:srgbClr val="FFFFFF"/>
-                </a:solidFill>
-                <a:latin typeface="Arial" pitchFamily="34" charset="0"/>
-                <a:ea typeface="Arial" pitchFamily="34" charset="-122"/>
-                <a:cs typeface="Arial" pitchFamily="34" charset="-120"/>
-              </a:rPr>
-              <a:t>El flujo, de un vistazo</a:t>
-            </a:r>
-            <a:endParaRPr lang="en-US" sz="2600" dirty="0"/>
-          </a:p>
-        </p:txBody>
-      </p:sp>
-      <p:sp>
-        <p:nvSpPr>
-          <p:cNvPr id="4" name="Text 2"/>
-          <p:cNvSpPr/>
-          <p:nvPr/>
-        </p:nvSpPr>
-        <p:spPr>
-          <a:xfrm>
-            <a:off x="548640" y="6473952"/>
-            <a:ext cx="11091672" cy="292608"/>
-          </a:xfrm>
-          <a:prstGeom prst="rect">
-            <a:avLst/>
-          </a:prstGeom>
-          <a:noFill/>
-          <a:ln/>
-        </p:spPr>
-        <p:txBody>
-          <a:bodyPr wrap="square" rtlCol="0" anchor="ctr"/>
-          <a:lstStyle/>
-          <a:p>
-            <a:pPr marL="0" indent="0" algn="r">
-              <a:buNone/>
-            </a:pPr>
-            <a:r>
-              <a:rPr lang="en-US" sz="1100" dirty="0">
-                <a:solidFill>
-                  <a:srgbClr val="757575"/>
-                </a:solidFill>
-                <a:latin typeface="Arial" pitchFamily="34" charset="0"/>
-                <a:ea typeface="Arial" pitchFamily="34" charset="-122"/>
-                <a:cs typeface="Arial" pitchFamily="34" charset="-120"/>
-              </a:rPr>
-              <a:t>Acceso a Datos — Tema 1: JDBC puro</a:t>
-            </a:r>
-            <a:endParaRPr lang="en-US" sz="1100" dirty="0"/>
-          </a:p>
-        </p:txBody>
-      </p:sp>
-      <p:pic>
-        <p:nvPicPr>
-          <p:cNvPr id="5" name="Image 0" descr="C:/Users/Aitor/docxgen/img/jdbc-transaccion.png"/>
-          <p:cNvPicPr>
-            <a:picLocks noChangeAspect="1"/>
-          </p:cNvPicPr>
-          <p:nvPr/>
-        </p:nvPicPr>
-        <p:blipFill>
-          <a:blip r:embed="rId3"/>
-          <a:stretch>
-            <a:fillRect/>
-          </a:stretch>
-        </p:blipFill>
-        <p:spPr>
-          <a:xfrm>
-            <a:off x="264422" y="2651760"/>
-            <a:ext cx="11660107" cy="2194560"/>
-          </a:xfrm>
-          <a:prstGeom prst="rect">
-            <a:avLst/>
-          </a:prstGeom>
-        </p:spPr>
-      </p:pic>
     </p:spTree>
   </p:cSld>
   <p:clrMapOvr>
@@ -11307,6 +11802,165 @@
 
 <file path=ppt/slides/slide30.xml><?xml version="1.0" encoding="utf-8"?>
 <p:sld xmlns:a="http://schemas.openxmlformats.org/drawingml/2006/main" xmlns:r="http://schemas.openxmlformats.org/officeDocument/2006/relationships" xmlns:p="http://schemas.openxmlformats.org/presentationml/2006/main">
+  <p:cSld name="Slide 29">
+    <p:spTree>
+      <p:nvGrpSpPr>
+        <p:cNvPr id="1" name=""/>
+        <p:cNvGrpSpPr/>
+        <p:nvPr/>
+      </p:nvGrpSpPr>
+      <p:grpSpPr>
+        <a:xfrm>
+          <a:off x="0" y="0"/>
+          <a:ext cx="0" cy="0"/>
+          <a:chOff x="0" y="0"/>
+          <a:chExt cx="0" cy="0"/>
+        </a:xfrm>
+      </p:grpSpPr>
+      <p:sp>
+        <p:nvSpPr>
+          <p:cNvPr id="2" name="Shape 0"/>
+          <p:cNvSpPr/>
+          <p:nvPr/>
+        </p:nvSpPr>
+        <p:spPr>
+          <a:xfrm>
+            <a:off x="0" y="0"/>
+            <a:ext cx="12188952" cy="777240"/>
+          </a:xfrm>
+          <a:prstGeom prst="rect">
+            <a:avLst/>
+          </a:prstGeom>
+          <a:solidFill>
+            <a:srgbClr val="7F0000"/>
+          </a:solidFill>
+          <a:ln w="12700">
+            <a:solidFill>
+              <a:srgbClr val="7F0000"/>
+            </a:solidFill>
+            <a:prstDash val="solid"/>
+          </a:ln>
+        </p:spPr>
+        <p:txBody>
+          <a:bodyPr/>
+          <a:lstStyle/>
+          <a:p>
+            <a:endParaRPr lang="es-ES"/>
+          </a:p>
+        </p:txBody>
+      </p:sp>
+      <p:sp>
+        <p:nvSpPr>
+          <p:cNvPr id="3" name="Text 1"/>
+          <p:cNvSpPr/>
+          <p:nvPr/>
+        </p:nvSpPr>
+        <p:spPr>
+          <a:xfrm>
+            <a:off x="365760" y="0"/>
+            <a:ext cx="11457432" cy="777240"/>
+          </a:xfrm>
+          <a:prstGeom prst="rect">
+            <a:avLst/>
+          </a:prstGeom>
+          <a:noFill/>
+          <a:ln/>
+        </p:spPr>
+        <p:txBody>
+          <a:bodyPr wrap="square" rtlCol="0" anchor="ctr"/>
+          <a:lstStyle/>
+          <a:p>
+            <a:pPr marL="0" indent="0">
+              <a:buNone/>
+            </a:pPr>
+            <a:r>
+              <a:rPr lang="en-US" sz="2600" b="1" dirty="0">
+                <a:solidFill>
+                  <a:srgbClr val="FFFFFF"/>
+                </a:solidFill>
+                <a:latin typeface="Arial" pitchFamily="34" charset="0"/>
+                <a:ea typeface="Arial" pitchFamily="34" charset="-122"/>
+                <a:cs typeface="Arial" pitchFamily="34" charset="-120"/>
+              </a:rPr>
+              <a:t>El flujo, de un vistazo</a:t>
+            </a:r>
+            <a:endParaRPr lang="en-US" sz="2600" dirty="0"/>
+          </a:p>
+        </p:txBody>
+      </p:sp>
+      <p:sp>
+        <p:nvSpPr>
+          <p:cNvPr id="4" name="Text 2"/>
+          <p:cNvSpPr/>
+          <p:nvPr/>
+        </p:nvSpPr>
+        <p:spPr>
+          <a:xfrm>
+            <a:off x="548640" y="6473952"/>
+            <a:ext cx="11091672" cy="292608"/>
+          </a:xfrm>
+          <a:prstGeom prst="rect">
+            <a:avLst/>
+          </a:prstGeom>
+          <a:noFill/>
+          <a:ln/>
+        </p:spPr>
+        <p:txBody>
+          <a:bodyPr wrap="square" rtlCol="0" anchor="ctr"/>
+          <a:lstStyle/>
+          <a:p>
+            <a:pPr marL="0" indent="0" algn="r">
+              <a:buNone/>
+            </a:pPr>
+            <a:r>
+              <a:rPr lang="en-US" sz="1100" dirty="0">
+                <a:solidFill>
+                  <a:srgbClr val="757575"/>
+                </a:solidFill>
+                <a:latin typeface="Arial" pitchFamily="34" charset="0"/>
+                <a:ea typeface="Arial" pitchFamily="34" charset="-122"/>
+                <a:cs typeface="Arial" pitchFamily="34" charset="-120"/>
+              </a:rPr>
+              <a:t>Acceso a Datos — Tema 1: JDBC puro</a:t>
+            </a:r>
+            <a:endParaRPr lang="en-US" sz="1100" dirty="0"/>
+          </a:p>
+        </p:txBody>
+      </p:sp>
+      <p:pic>
+        <p:nvPicPr>
+          <p:cNvPr id="5" name="Image 0" descr="C:/Users/Aitor/docxgen/img/jdbc-transaccion.png"/>
+          <p:cNvPicPr>
+            <a:picLocks noChangeAspect="1"/>
+          </p:cNvPicPr>
+          <p:nvPr/>
+        </p:nvPicPr>
+        <p:blipFill>
+          <a:blip r:embed="rId3"/>
+          <a:stretch>
+            <a:fillRect/>
+          </a:stretch>
+        </p:blipFill>
+        <p:spPr>
+          <a:xfrm>
+            <a:off x="264422" y="2651760"/>
+            <a:ext cx="11660107" cy="2194560"/>
+          </a:xfrm>
+          <a:prstGeom prst="rect">
+            <a:avLst/>
+          </a:prstGeom>
+        </p:spPr>
+      </p:pic>
+    </p:spTree>
+  </p:cSld>
+  <p:clrMapOvr>
+    <a:masterClrMapping/>
+  </p:clrMapOvr>
+</p:sld>
+</file>
+
+<file path=ppt/slides/slide31.xml><?xml version="1.0" encoding="utf-8"?>
+<p:sld xmlns:a="http://schemas.openxmlformats.org/drawingml/2006/main" xmlns:r="http://schemas.openxmlformats.org/officeDocument/2006/relationships" xmlns:p="http://schemas.openxmlformats.org/presentationml/2006/main">
   <p:cSld name="Slide 30">
     <p:spTree>
       <p:nvGrpSpPr>
@@ -11511,7 +12165,7 @@
 </p:sld>
 </file>
 
-<file path=ppt/slides/slide31.xml><?xml version="1.0" encoding="utf-8"?>
+<file path=ppt/slides/slide32.xml><?xml version="1.0" encoding="utf-8"?>
 <p:sld xmlns:a="http://schemas.openxmlformats.org/drawingml/2006/main" xmlns:r="http://schemas.openxmlformats.org/officeDocument/2006/relationships" xmlns:p="http://schemas.openxmlformats.org/presentationml/2006/main">
   <p:cSld name="Slide 31">
     <p:spTree>
@@ -11717,7 +12371,7 @@
 </p:sld>
 </file>
 
-<file path=ppt/slides/slide32.xml><?xml version="1.0" encoding="utf-8"?>
+<file path=ppt/slides/slide33.xml><?xml version="1.0" encoding="utf-8"?>
 <p:sld xmlns:a="http://schemas.openxmlformats.org/drawingml/2006/main" xmlns:r="http://schemas.openxmlformats.org/officeDocument/2006/relationships" xmlns:p="http://schemas.openxmlformats.org/presentationml/2006/main">
   <p:cSld name="Slide 32">
     <p:spTree>
@@ -12752,7 +13406,7 @@
 </p:sld>
 </file>
 
-<file path=ppt/slides/slide33.xml><?xml version="1.0" encoding="utf-8"?>
+<file path=ppt/slides/slide34.xml><?xml version="1.0" encoding="utf-8"?>
 <p:sld xmlns:a="http://schemas.openxmlformats.org/drawingml/2006/main" xmlns:r="http://schemas.openxmlformats.org/officeDocument/2006/relationships" xmlns:p="http://schemas.openxmlformats.org/presentationml/2006/main">
   <p:cSld name="Slide 33">
     <p:spTree>
@@ -12958,7 +13612,7 @@
 </p:sld>
 </file>
 
-<file path=ppt/slides/slide34.xml><?xml version="1.0" encoding="utf-8"?>
+<file path=ppt/slides/slide35.xml><?xml version="1.0" encoding="utf-8"?>
 <p:sld xmlns:a="http://schemas.openxmlformats.org/drawingml/2006/main" xmlns:r="http://schemas.openxmlformats.org/officeDocument/2006/relationships" xmlns:p="http://schemas.openxmlformats.org/presentationml/2006/main">
   <p:cSld name="Slide 34">
     <p:spTree>
@@ -13164,7 +13818,7 @@
 </p:sld>
 </file>
 
-<file path=ppt/slides/slide35.xml><?xml version="1.0" encoding="utf-8"?>
+<file path=ppt/slides/slide36.xml><?xml version="1.0" encoding="utf-8"?>
 <p:sld xmlns:a="http://schemas.openxmlformats.org/drawingml/2006/main" xmlns:r="http://schemas.openxmlformats.org/officeDocument/2006/relationships" xmlns:p="http://schemas.openxmlformats.org/presentationml/2006/main">
   <p:cSld name="Slide 35">
     <p:spTree>
@@ -13409,7 +14063,7 @@
 </p:sld>
 </file>
 
-<file path=ppt/slides/slide36.xml><?xml version="1.0" encoding="utf-8"?>
+<file path=ppt/slides/slide37.xml><?xml version="1.0" encoding="utf-8"?>
 <p:sld xmlns:a="http://schemas.openxmlformats.org/drawingml/2006/main" xmlns:r="http://schemas.openxmlformats.org/officeDocument/2006/relationships" xmlns:p="http://schemas.openxmlformats.org/presentationml/2006/main">
   <p:cSld name="Slide 36">
     <p:spTree>
@@ -13650,7 +14304,7 @@
 </p:sld>
 </file>
 
-<file path=ppt/slides/slide37.xml><?xml version="1.0" encoding="utf-8"?>
+<file path=ppt/slides/slide38.xml><?xml version="1.0" encoding="utf-8"?>
 <p:sld xmlns:a="http://schemas.openxmlformats.org/drawingml/2006/main" xmlns:r="http://schemas.openxmlformats.org/officeDocument/2006/relationships" xmlns:p="http://schemas.openxmlformats.org/presentationml/2006/main">
   <p:cSld name="Slide 37">
     <p:spTree>
@@ -13872,6 +14526,200 @@
 
 <file path=ppt/slides/slide4.xml><?xml version="1.0" encoding="utf-8"?>
 <p:sld xmlns:a="http://schemas.openxmlformats.org/drawingml/2006/main" xmlns:r="http://schemas.openxmlformats.org/officeDocument/2006/relationships" xmlns:p="http://schemas.openxmlformats.org/presentationml/2006/main">
+  <p:cSld>
+    <p:spTree>
+      <p:nvGrpSpPr>
+        <p:cNvPr id="1" name="">
+          <a:extLst>
+            <a:ext uri="{FF2B5EF4-FFF2-40B4-BE49-F238E27FC236}">
+              <a16:creationId xmlns:a16="http://schemas.microsoft.com/office/drawing/2014/main" id="{5BDF6DF8-742F-5735-6898-453343242ED7}"/>
+            </a:ext>
+          </a:extLst>
+        </p:cNvPr>
+        <p:cNvGrpSpPr/>
+        <p:nvPr/>
+      </p:nvGrpSpPr>
+      <p:grpSpPr>
+        <a:xfrm>
+          <a:off x="0" y="0"/>
+          <a:ext cx="0" cy="0"/>
+          <a:chOff x="0" y="0"/>
+          <a:chExt cx="0" cy="0"/>
+        </a:xfrm>
+      </p:grpSpPr>
+      <p:sp>
+        <p:nvSpPr>
+          <p:cNvPr id="2" name="Shape 0">
+            <a:extLst>
+              <a:ext uri="{FF2B5EF4-FFF2-40B4-BE49-F238E27FC236}">
+                <a16:creationId xmlns:a16="http://schemas.microsoft.com/office/drawing/2014/main" id="{99889381-DBD4-66BB-4D3B-08197B8AC470}"/>
+              </a:ext>
+            </a:extLst>
+          </p:cNvPr>
+          <p:cNvSpPr/>
+          <p:nvPr/>
+        </p:nvSpPr>
+        <p:spPr>
+          <a:xfrm>
+            <a:off x="0" y="0"/>
+            <a:ext cx="12188952" cy="777240"/>
+          </a:xfrm>
+          <a:prstGeom prst="rect">
+            <a:avLst/>
+          </a:prstGeom>
+          <a:solidFill>
+            <a:srgbClr val="7F0000"/>
+          </a:solidFill>
+          <a:ln w="12700">
+            <a:solidFill>
+              <a:srgbClr val="7F0000"/>
+            </a:solidFill>
+            <a:prstDash val="solid"/>
+          </a:ln>
+        </p:spPr>
+        <p:txBody>
+          <a:bodyPr/>
+          <a:lstStyle/>
+          <a:p>
+            <a:endParaRPr lang="es-ES"/>
+          </a:p>
+        </p:txBody>
+      </p:sp>
+      <p:sp>
+        <p:nvSpPr>
+          <p:cNvPr id="3" name="Text 1">
+            <a:extLst>
+              <a:ext uri="{FF2B5EF4-FFF2-40B4-BE49-F238E27FC236}">
+                <a16:creationId xmlns:a16="http://schemas.microsoft.com/office/drawing/2014/main" id="{CF2C9CD8-B79E-CFBE-6F74-E3515EC58F15}"/>
+              </a:ext>
+            </a:extLst>
+          </p:cNvPr>
+          <p:cNvSpPr/>
+          <p:nvPr/>
+        </p:nvSpPr>
+        <p:spPr>
+          <a:xfrm>
+            <a:off x="365760" y="0"/>
+            <a:ext cx="11457432" cy="777240"/>
+          </a:xfrm>
+          <a:prstGeom prst="rect">
+            <a:avLst/>
+          </a:prstGeom>
+          <a:noFill/>
+          <a:ln/>
+        </p:spPr>
+        <p:txBody>
+          <a:bodyPr wrap="square" rtlCol="0" anchor="ctr"/>
+          <a:lstStyle/>
+          <a:p>
+            <a:pPr marL="0" indent="0">
+              <a:buNone/>
+            </a:pPr>
+            <a:r>
+              <a:rPr lang="en-US" sz="2600" b="1" dirty="0">
+                <a:solidFill>
+                  <a:srgbClr val="FFFFFF"/>
+                </a:solidFill>
+                <a:latin typeface="Arial" pitchFamily="34" charset="0"/>
+                <a:ea typeface="Arial" pitchFamily="34" charset="-122"/>
+                <a:cs typeface="Arial" pitchFamily="34" charset="-120"/>
+              </a:rPr>
+              <a:t>Las cuatro piezas de JDBC</a:t>
+            </a:r>
+            <a:endParaRPr lang="en-US" sz="2600" dirty="0"/>
+          </a:p>
+        </p:txBody>
+      </p:sp>
+      <p:sp>
+        <p:nvSpPr>
+          <p:cNvPr id="4" name="Text 2">
+            <a:extLst>
+              <a:ext uri="{FF2B5EF4-FFF2-40B4-BE49-F238E27FC236}">
+                <a16:creationId xmlns:a16="http://schemas.microsoft.com/office/drawing/2014/main" id="{5C676D17-CF27-5858-2D79-682F93EC52BE}"/>
+              </a:ext>
+            </a:extLst>
+          </p:cNvPr>
+          <p:cNvSpPr/>
+          <p:nvPr/>
+        </p:nvSpPr>
+        <p:spPr>
+          <a:xfrm>
+            <a:off x="548640" y="6473952"/>
+            <a:ext cx="11091672" cy="292608"/>
+          </a:xfrm>
+          <a:prstGeom prst="rect">
+            <a:avLst/>
+          </a:prstGeom>
+          <a:noFill/>
+          <a:ln/>
+        </p:spPr>
+        <p:txBody>
+          <a:bodyPr wrap="square" rtlCol="0" anchor="ctr"/>
+          <a:lstStyle/>
+          <a:p>
+            <a:pPr marL="0" indent="0" algn="r">
+              <a:buNone/>
+            </a:pPr>
+            <a:r>
+              <a:rPr lang="en-US" sz="1100" dirty="0">
+                <a:solidFill>
+                  <a:srgbClr val="757575"/>
+                </a:solidFill>
+                <a:latin typeface="Arial" pitchFamily="34" charset="0"/>
+                <a:ea typeface="Arial" pitchFamily="34" charset="-122"/>
+                <a:cs typeface="Arial" pitchFamily="34" charset="-120"/>
+              </a:rPr>
+              <a:t>Acceso a Datos — Tema 1: JDBC puro</a:t>
+            </a:r>
+            <a:endParaRPr lang="en-US" sz="1100" dirty="0"/>
+          </a:p>
+        </p:txBody>
+      </p:sp>
+      <p:pic>
+        <p:nvPicPr>
+          <p:cNvPr id="8" name="Imagen 7">
+            <a:extLst>
+              <a:ext uri="{FF2B5EF4-FFF2-40B4-BE49-F238E27FC236}">
+                <a16:creationId xmlns:a16="http://schemas.microsoft.com/office/drawing/2014/main" id="{F71034BA-8450-5C7F-FB86-67822A136C8B}"/>
+              </a:ext>
+            </a:extLst>
+          </p:cNvPr>
+          <p:cNvPicPr>
+            <a:picLocks noChangeAspect="1"/>
+          </p:cNvPicPr>
+          <p:nvPr/>
+        </p:nvPicPr>
+        <p:blipFill>
+          <a:blip r:embed="rId3"/>
+          <a:stretch>
+            <a:fillRect/>
+          </a:stretch>
+        </p:blipFill>
+        <p:spPr>
+          <a:xfrm>
+            <a:off x="410357" y="1287624"/>
+            <a:ext cx="11371286" cy="4547367"/>
+          </a:xfrm>
+          <a:prstGeom prst="rect">
+            <a:avLst/>
+          </a:prstGeom>
+        </p:spPr>
+      </p:pic>
+    </p:spTree>
+    <p:extLst>
+      <p:ext uri="{BB962C8B-B14F-4D97-AF65-F5344CB8AC3E}">
+        <p14:creationId xmlns:p14="http://schemas.microsoft.com/office/powerpoint/2010/main" val="1453660596"/>
+      </p:ext>
+    </p:extLst>
+  </p:cSld>
+  <p:clrMapOvr>
+    <a:masterClrMapping/>
+  </p:clrMapOvr>
+</p:sld>
+</file>
+
+<file path=ppt/slides/slide5.xml><?xml version="1.0" encoding="utf-8"?>
+<p:sld xmlns:a="http://schemas.openxmlformats.org/drawingml/2006/main" xmlns:r="http://schemas.openxmlformats.org/officeDocument/2006/relationships" xmlns:p="http://schemas.openxmlformats.org/presentationml/2006/main">
   <p:cSld name="Slide 4">
     <p:spTree>
       <p:nvGrpSpPr>
@@ -14076,7 +14924,7 @@
 </p:sld>
 </file>
 
-<file path=ppt/slides/slide5.xml><?xml version="1.0" encoding="utf-8"?>
+<file path=ppt/slides/slide6.xml><?xml version="1.0" encoding="utf-8"?>
 <p:sld xmlns:a="http://schemas.openxmlformats.org/drawingml/2006/main" xmlns:r="http://schemas.openxmlformats.org/officeDocument/2006/relationships" xmlns:p="http://schemas.openxmlformats.org/presentationml/2006/main">
   <p:cSld name="Slide 5">
     <p:spTree>
@@ -14377,7 +15225,7 @@
 </p:sld>
 </file>
 
-<file path=ppt/slides/slide6.xml><?xml version="1.0" encoding="utf-8"?>
+<file path=ppt/slides/slide7.xml><?xml version="1.0" encoding="utf-8"?>
 <p:sld xmlns:a="http://schemas.openxmlformats.org/drawingml/2006/main" xmlns:r="http://schemas.openxmlformats.org/officeDocument/2006/relationships" xmlns:p="http://schemas.openxmlformats.org/presentationml/2006/main">
   <p:cSld name="Slide 6">
     <p:spTree>
@@ -14583,7 +15431,7 @@
 </p:sld>
 </file>
 
-<file path=ppt/slides/slide7.xml><?xml version="1.0" encoding="utf-8"?>
+<file path=ppt/slides/slide8.xml><?xml version="1.0" encoding="utf-8"?>
 <p:sld xmlns:a="http://schemas.openxmlformats.org/drawingml/2006/main" xmlns:r="http://schemas.openxmlformats.org/officeDocument/2006/relationships" xmlns:p="http://schemas.openxmlformats.org/presentationml/2006/main">
   <p:cSld name="Slide 7">
     <p:spTree>
@@ -14757,7 +15605,7 @@
 </p:sld>
 </file>
 
-<file path=ppt/slides/slide8.xml><?xml version="1.0" encoding="utf-8"?>
+<file path=ppt/slides/slide9.xml><?xml version="1.0" encoding="utf-8"?>
 <p:sld xmlns:a="http://schemas.openxmlformats.org/drawingml/2006/main" xmlns:r="http://schemas.openxmlformats.org/officeDocument/2006/relationships" xmlns:p="http://schemas.openxmlformats.org/presentationml/2006/main">
   <p:cSld name="Slide 8">
     <p:spTree>
@@ -15057,551 +15905,6 @@
               <a:t>Una línea, sin cuerpo. Spring Data JPA lee el nombre del método (findBy + EditorialId) y genera la consulta SQL él solo, sin que escribas nada dentro de la interfaz.</a:t>
             </a:r>
             <a:endParaRPr lang="en-US" sz="2000" dirty="0"/>
-          </a:p>
-        </p:txBody>
-      </p:sp>
-    </p:spTree>
-  </p:cSld>
-  <p:clrMapOvr>
-    <a:masterClrMapping/>
-  </p:clrMapOvr>
-</p:sld>
-</file>
-
-<file path=ppt/slides/slide9.xml><?xml version="1.0" encoding="utf-8"?>
-<p:sld xmlns:a="http://schemas.openxmlformats.org/drawingml/2006/main" xmlns:r="http://schemas.openxmlformats.org/officeDocument/2006/relationships" xmlns:p="http://schemas.openxmlformats.org/presentationml/2006/main">
-  <p:cSld name="Slide 9">
-    <p:spTree>
-      <p:nvGrpSpPr>
-        <p:cNvPr id="1" name=""/>
-        <p:cNvGrpSpPr/>
-        <p:nvPr/>
-      </p:nvGrpSpPr>
-      <p:grpSpPr>
-        <a:xfrm>
-          <a:off x="0" y="0"/>
-          <a:ext cx="0" cy="0"/>
-          <a:chOff x="0" y="0"/>
-          <a:chExt cx="0" cy="0"/>
-        </a:xfrm>
-      </p:grpSpPr>
-      <p:sp>
-        <p:nvSpPr>
-          <p:cNvPr id="2" name="Shape 0"/>
-          <p:cNvSpPr/>
-          <p:nvPr/>
-        </p:nvSpPr>
-        <p:spPr>
-          <a:xfrm>
-            <a:off x="0" y="0"/>
-            <a:ext cx="12188952" cy="777240"/>
-          </a:xfrm>
-          <a:prstGeom prst="rect">
-            <a:avLst/>
-          </a:prstGeom>
-          <a:solidFill>
-            <a:srgbClr val="7F0000"/>
-          </a:solidFill>
-          <a:ln w="12700">
-            <a:solidFill>
-              <a:srgbClr val="7F0000"/>
-            </a:solidFill>
-            <a:prstDash val="solid"/>
-          </a:ln>
-        </p:spPr>
-        <p:txBody>
-          <a:bodyPr/>
-          <a:lstStyle/>
-          <a:p>
-            <a:endParaRPr lang="es-ES"/>
-          </a:p>
-        </p:txBody>
-      </p:sp>
-      <p:sp>
-        <p:nvSpPr>
-          <p:cNvPr id="3" name="Text 1"/>
-          <p:cNvSpPr/>
-          <p:nvPr/>
-        </p:nvSpPr>
-        <p:spPr>
-          <a:xfrm>
-            <a:off x="365760" y="0"/>
-            <a:ext cx="11457432" cy="777240"/>
-          </a:xfrm>
-          <a:prstGeom prst="rect">
-            <a:avLst/>
-          </a:prstGeom>
-          <a:noFill/>
-          <a:ln/>
-        </p:spPr>
-        <p:txBody>
-          <a:bodyPr wrap="square" rtlCol="0" anchor="ctr"/>
-          <a:lstStyle/>
-          <a:p>
-            <a:pPr marL="0" indent="0">
-              <a:buNone/>
-            </a:pPr>
-            <a:r>
-              <a:rPr lang="en-US" sz="2600" b="1" dirty="0">
-                <a:solidFill>
-                  <a:srgbClr val="FFFFFF"/>
-                </a:solidFill>
-                <a:latin typeface="Arial" pitchFamily="34" charset="0"/>
-                <a:ea typeface="Arial" pitchFamily="34" charset="-122"/>
-                <a:cs typeface="Arial" pitchFamily="34" charset="-120"/>
-              </a:rPr>
-              <a:t>Con JDBC puro (lo que vas a hacer hoy)</a:t>
-            </a:r>
-            <a:endParaRPr lang="en-US" sz="2600" dirty="0"/>
-          </a:p>
-        </p:txBody>
-      </p:sp>
-      <p:sp>
-        <p:nvSpPr>
-          <p:cNvPr id="4" name="Text 2"/>
-          <p:cNvSpPr/>
-          <p:nvPr/>
-        </p:nvSpPr>
-        <p:spPr>
-          <a:xfrm>
-            <a:off x="548640" y="6473952"/>
-            <a:ext cx="11091672" cy="292608"/>
-          </a:xfrm>
-          <a:prstGeom prst="rect">
-            <a:avLst/>
-          </a:prstGeom>
-          <a:noFill/>
-          <a:ln/>
-        </p:spPr>
-        <p:txBody>
-          <a:bodyPr wrap="square" rtlCol="0" anchor="ctr"/>
-          <a:lstStyle/>
-          <a:p>
-            <a:pPr marL="0" indent="0" algn="r">
-              <a:buNone/>
-            </a:pPr>
-            <a:r>
-              <a:rPr lang="en-US" sz="1100" dirty="0">
-                <a:solidFill>
-                  <a:srgbClr val="757575"/>
-                </a:solidFill>
-                <a:latin typeface="Arial" pitchFamily="34" charset="0"/>
-                <a:ea typeface="Arial" pitchFamily="34" charset="-122"/>
-                <a:cs typeface="Arial" pitchFamily="34" charset="-120"/>
-              </a:rPr>
-              <a:t>Acceso a Datos — Tema 1: JDBC puro</a:t>
-            </a:r>
-            <a:endParaRPr lang="en-US" sz="1100" dirty="0"/>
-          </a:p>
-        </p:txBody>
-      </p:sp>
-      <p:sp>
-        <p:nvSpPr>
-          <p:cNvPr id="5" name="Shape 3"/>
-          <p:cNvSpPr/>
-          <p:nvPr/>
-        </p:nvSpPr>
-        <p:spPr>
-          <a:xfrm>
-            <a:off x="548640" y="1234439"/>
-            <a:ext cx="11091672" cy="5054393"/>
-          </a:xfrm>
-          <a:prstGeom prst="rect">
-            <a:avLst/>
-          </a:prstGeom>
-          <a:solidFill>
-            <a:srgbClr val="ECEFF1"/>
-          </a:solidFill>
-          <a:ln w="12700">
-            <a:solidFill>
-              <a:srgbClr val="EEEEEE"/>
-            </a:solidFill>
-            <a:prstDash val="solid"/>
-          </a:ln>
-        </p:spPr>
-        <p:txBody>
-          <a:bodyPr/>
-          <a:lstStyle/>
-          <a:p>
-            <a:endParaRPr lang="es-ES"/>
-          </a:p>
-        </p:txBody>
-      </p:sp>
-      <p:sp>
-        <p:nvSpPr>
-          <p:cNvPr id="6" name="Shape 4"/>
-          <p:cNvSpPr/>
-          <p:nvPr/>
-        </p:nvSpPr>
-        <p:spPr>
-          <a:xfrm>
-            <a:off x="548640" y="1234440"/>
-            <a:ext cx="73152" cy="5054392"/>
-          </a:xfrm>
-          <a:prstGeom prst="rect">
-            <a:avLst/>
-          </a:prstGeom>
-          <a:solidFill>
-            <a:srgbClr val="E64A19"/>
-          </a:solidFill>
-          <a:ln w="12700">
-            <a:solidFill>
-              <a:srgbClr val="E64A19"/>
-            </a:solidFill>
-            <a:prstDash val="solid"/>
-          </a:ln>
-        </p:spPr>
-        <p:txBody>
-          <a:bodyPr/>
-          <a:lstStyle/>
-          <a:p>
-            <a:endParaRPr lang="es-ES"/>
-          </a:p>
-        </p:txBody>
-      </p:sp>
-      <p:sp>
-        <p:nvSpPr>
-          <p:cNvPr id="7" name="Text 5"/>
-          <p:cNvSpPr/>
-          <p:nvPr/>
-        </p:nvSpPr>
-        <p:spPr>
-          <a:xfrm>
-            <a:off x="822960" y="1344168"/>
-            <a:ext cx="10588752" cy="4626864"/>
-          </a:xfrm>
-          <a:prstGeom prst="rect">
-            <a:avLst/>
-          </a:prstGeom>
-          <a:noFill/>
-          <a:ln/>
-        </p:spPr>
-        <p:txBody>
-          <a:bodyPr wrap="square" rtlCol="0" anchor="t"/>
-          <a:lstStyle/>
-          <a:p>
-            <a:pPr marL="0" indent="0">
-              <a:buNone/>
-            </a:pPr>
-            <a:r>
-              <a:rPr lang="en-US" sz="1500" dirty="0">
-                <a:solidFill>
-                  <a:srgbClr val="263238"/>
-                </a:solidFill>
-                <a:latin typeface="Courier New" pitchFamily="34" charset="0"/>
-                <a:ea typeface="Courier New" pitchFamily="34" charset="-122"/>
-                <a:cs typeface="Courier New" pitchFamily="34" charset="-120"/>
-              </a:rPr>
-              <a:t>String sql = "SELECT id, titulo, precio FROM libro WHERE editorial_id = ?";</a:t>
-            </a:r>
-            <a:endParaRPr lang="en-US" sz="1500" dirty="0"/>
-          </a:p>
-          <a:p>
-            <a:pPr marL="0" indent="0">
-              <a:buNone/>
-            </a:pPr>
-            <a:endParaRPr lang="en-US" sz="1500" dirty="0"/>
-          </a:p>
-          <a:p>
-            <a:pPr marL="0" indent="0">
-              <a:buNone/>
-            </a:pPr>
-            <a:r>
-              <a:rPr lang="en-US" sz="1500" dirty="0">
-                <a:solidFill>
-                  <a:srgbClr val="263238"/>
-                </a:solidFill>
-                <a:latin typeface="Courier New" pitchFamily="34" charset="0"/>
-                <a:ea typeface="Courier New" pitchFamily="34" charset="-122"/>
-                <a:cs typeface="Courier New" pitchFamily="34" charset="-120"/>
-              </a:rPr>
-              <a:t>try (Connection conn = DriverManager.getConnection(url, user, pass);</a:t>
-            </a:r>
-            <a:endParaRPr lang="en-US" sz="1500" dirty="0"/>
-          </a:p>
-          <a:p>
-            <a:pPr marL="0" indent="0">
-              <a:buNone/>
-            </a:pPr>
-            <a:r>
-              <a:rPr lang="en-US" sz="1500" dirty="0">
-                <a:solidFill>
-                  <a:srgbClr val="263238"/>
-                </a:solidFill>
-                <a:latin typeface="Courier New" pitchFamily="34" charset="0"/>
-                <a:ea typeface="Courier New" pitchFamily="34" charset="-122"/>
-                <a:cs typeface="Courier New" pitchFamily="34" charset="-120"/>
-              </a:rPr>
-              <a:t>     PreparedStatement stmt = conn.prepareStatement(sql)) {</a:t>
-            </a:r>
-            <a:endParaRPr lang="en-US" sz="1500" dirty="0"/>
-          </a:p>
-          <a:p>
-            <a:pPr marL="0" indent="0">
-              <a:buNone/>
-            </a:pPr>
-            <a:endParaRPr lang="en-US" sz="1500" dirty="0"/>
-          </a:p>
-          <a:p>
-            <a:pPr marL="0" indent="0">
-              <a:buNone/>
-            </a:pPr>
-            <a:r>
-              <a:rPr lang="en-US" sz="1500" dirty="0">
-                <a:solidFill>
-                  <a:srgbClr val="263238"/>
-                </a:solidFill>
-                <a:latin typeface="Courier New" pitchFamily="34" charset="0"/>
-                <a:ea typeface="Courier New" pitchFamily="34" charset="-122"/>
-                <a:cs typeface="Courier New" pitchFamily="34" charset="-120"/>
-              </a:rPr>
-              <a:t>    stmt.setLong(1, editorialId);</a:t>
-            </a:r>
-            <a:endParaRPr lang="en-US" sz="1500" dirty="0"/>
-          </a:p>
-          <a:p>
-            <a:pPr marL="0" indent="0">
-              <a:buNone/>
-            </a:pPr>
-            <a:endParaRPr lang="en-US" sz="1500" dirty="0"/>
-          </a:p>
-          <a:p>
-            <a:pPr marL="0" indent="0">
-              <a:buNone/>
-            </a:pPr>
-            <a:r>
-              <a:rPr lang="en-US" sz="1500" dirty="0">
-                <a:solidFill>
-                  <a:srgbClr val="263238"/>
-                </a:solidFill>
-                <a:latin typeface="Courier New" pitchFamily="34" charset="0"/>
-                <a:ea typeface="Courier New" pitchFamily="34" charset="-122"/>
-                <a:cs typeface="Courier New" pitchFamily="34" charset="-120"/>
-              </a:rPr>
-              <a:t>    try (ResultSet rs = stmt.executeQuery()) {</a:t>
-            </a:r>
-            <a:endParaRPr lang="en-US" sz="1500" dirty="0"/>
-          </a:p>
-          <a:p>
-            <a:pPr marL="0" indent="0">
-              <a:buNone/>
-            </a:pPr>
-            <a:r>
-              <a:rPr lang="en-US" sz="1500" dirty="0">
-                <a:solidFill>
-                  <a:srgbClr val="263238"/>
-                </a:solidFill>
-                <a:latin typeface="Courier New" pitchFamily="34" charset="0"/>
-                <a:ea typeface="Courier New" pitchFamily="34" charset="-122"/>
-                <a:cs typeface="Courier New" pitchFamily="34" charset="-120"/>
-              </a:rPr>
-              <a:t>        List&lt;Libro&gt; libros = new ArrayList&lt;&gt;();</a:t>
-            </a:r>
-            <a:endParaRPr lang="en-US" sz="1500" dirty="0"/>
-          </a:p>
-          <a:p>
-            <a:pPr marL="0" indent="0">
-              <a:buNone/>
-            </a:pPr>
-            <a:r>
-              <a:rPr lang="en-US" sz="1500" dirty="0">
-                <a:solidFill>
-                  <a:srgbClr val="263238"/>
-                </a:solidFill>
-                <a:latin typeface="Courier New" pitchFamily="34" charset="0"/>
-                <a:ea typeface="Courier New" pitchFamily="34" charset="-122"/>
-                <a:cs typeface="Courier New" pitchFamily="34" charset="-120"/>
-              </a:rPr>
-              <a:t>        while (rs.next()) {</a:t>
-            </a:r>
-            <a:endParaRPr lang="en-US" sz="1500" dirty="0"/>
-          </a:p>
-          <a:p>
-            <a:pPr marL="0" indent="0">
-              <a:buNone/>
-            </a:pPr>
-            <a:r>
-              <a:rPr lang="en-US" sz="1500" dirty="0">
-                <a:solidFill>
-                  <a:srgbClr val="263238"/>
-                </a:solidFill>
-                <a:latin typeface="Courier New" pitchFamily="34" charset="0"/>
-                <a:ea typeface="Courier New" pitchFamily="34" charset="-122"/>
-                <a:cs typeface="Courier New" pitchFamily="34" charset="-120"/>
-              </a:rPr>
-              <a:t>            Libro libro = new Libro();</a:t>
-            </a:r>
-            <a:endParaRPr lang="en-US" sz="1500" dirty="0"/>
-          </a:p>
-          <a:p>
-            <a:pPr marL="0" indent="0">
-              <a:buNone/>
-            </a:pPr>
-            <a:r>
-              <a:rPr lang="en-US" sz="1500" dirty="0">
-                <a:solidFill>
-                  <a:srgbClr val="263238"/>
-                </a:solidFill>
-                <a:latin typeface="Courier New" pitchFamily="34" charset="0"/>
-                <a:ea typeface="Courier New" pitchFamily="34" charset="-122"/>
-                <a:cs typeface="Courier New" pitchFamily="34" charset="-120"/>
-              </a:rPr>
-              <a:t>            libro.setId(rs.getLong("id"));</a:t>
-            </a:r>
-            <a:endParaRPr lang="en-US" sz="1500" dirty="0"/>
-          </a:p>
-          <a:p>
-            <a:pPr marL="0" indent="0">
-              <a:buNone/>
-            </a:pPr>
-            <a:r>
-              <a:rPr lang="en-US" sz="1500" dirty="0">
-                <a:solidFill>
-                  <a:srgbClr val="263238"/>
-                </a:solidFill>
-                <a:latin typeface="Courier New" pitchFamily="34" charset="0"/>
-                <a:ea typeface="Courier New" pitchFamily="34" charset="-122"/>
-                <a:cs typeface="Courier New" pitchFamily="34" charset="-120"/>
-              </a:rPr>
-              <a:t>            libro.setTitulo(rs.getString("titulo"));</a:t>
-            </a:r>
-            <a:endParaRPr lang="en-US" sz="1500" dirty="0"/>
-          </a:p>
-          <a:p>
-            <a:pPr marL="0" indent="0">
-              <a:buNone/>
-            </a:pPr>
-            <a:r>
-              <a:rPr lang="en-US" sz="1500" dirty="0">
-                <a:solidFill>
-                  <a:srgbClr val="263238"/>
-                </a:solidFill>
-                <a:latin typeface="Courier New" pitchFamily="34" charset="0"/>
-                <a:ea typeface="Courier New" pitchFamily="34" charset="-122"/>
-                <a:cs typeface="Courier New" pitchFamily="34" charset="-120"/>
-              </a:rPr>
-              <a:t>            libro.setPrecio(rs.getBigDecimal("precio"));</a:t>
-            </a:r>
-            <a:endParaRPr lang="en-US" sz="1500" dirty="0"/>
-          </a:p>
-          <a:p>
-            <a:pPr marL="0" indent="0">
-              <a:buNone/>
-            </a:pPr>
-            <a:r>
-              <a:rPr lang="en-US" sz="1500" dirty="0">
-                <a:solidFill>
-                  <a:srgbClr val="263238"/>
-                </a:solidFill>
-                <a:latin typeface="Courier New" pitchFamily="34" charset="0"/>
-                <a:ea typeface="Courier New" pitchFamily="34" charset="-122"/>
-                <a:cs typeface="Courier New" pitchFamily="34" charset="-120"/>
-              </a:rPr>
-              <a:t>            libros.add(libro);</a:t>
-            </a:r>
-            <a:endParaRPr lang="en-US" sz="1500" dirty="0"/>
-          </a:p>
-          <a:p>
-            <a:pPr marL="0" indent="0">
-              <a:buNone/>
-            </a:pPr>
-            <a:r>
-              <a:rPr lang="en-US" sz="1500" dirty="0">
-                <a:solidFill>
-                  <a:srgbClr val="263238"/>
-                </a:solidFill>
-                <a:latin typeface="Courier New" pitchFamily="34" charset="0"/>
-                <a:ea typeface="Courier New" pitchFamily="34" charset="-122"/>
-                <a:cs typeface="Courier New" pitchFamily="34" charset="-120"/>
-              </a:rPr>
-              <a:t>        }</a:t>
-            </a:r>
-            <a:endParaRPr lang="en-US" sz="1500" dirty="0"/>
-          </a:p>
-          <a:p>
-            <a:pPr marL="0" indent="0">
-              <a:buNone/>
-            </a:pPr>
-            <a:r>
-              <a:rPr lang="en-US" sz="1500" dirty="0">
-                <a:solidFill>
-                  <a:srgbClr val="263238"/>
-                </a:solidFill>
-                <a:latin typeface="Courier New" pitchFamily="34" charset="0"/>
-                <a:ea typeface="Courier New" pitchFamily="34" charset="-122"/>
-                <a:cs typeface="Courier New" pitchFamily="34" charset="-120"/>
-              </a:rPr>
-              <a:t>        return libros;</a:t>
-            </a:r>
-            <a:endParaRPr lang="en-US" sz="1500" dirty="0"/>
-          </a:p>
-          <a:p>
-            <a:pPr marL="0" indent="0">
-              <a:buNone/>
-            </a:pPr>
-            <a:r>
-              <a:rPr lang="en-US" sz="1500" dirty="0">
-                <a:solidFill>
-                  <a:srgbClr val="263238"/>
-                </a:solidFill>
-                <a:latin typeface="Courier New" pitchFamily="34" charset="0"/>
-                <a:ea typeface="Courier New" pitchFamily="34" charset="-122"/>
-                <a:cs typeface="Courier New" pitchFamily="34" charset="-120"/>
-              </a:rPr>
-              <a:t>    }</a:t>
-            </a:r>
-            <a:endParaRPr lang="en-US" sz="1500" dirty="0"/>
-          </a:p>
-          <a:p>
-            <a:pPr marL="0" indent="0">
-              <a:buNone/>
-            </a:pPr>
-            <a:r>
-              <a:rPr lang="en-US" sz="1500" dirty="0">
-                <a:solidFill>
-                  <a:srgbClr val="263238"/>
-                </a:solidFill>
-                <a:latin typeface="Courier New" pitchFamily="34" charset="0"/>
-                <a:ea typeface="Courier New" pitchFamily="34" charset="-122"/>
-                <a:cs typeface="Courier New" pitchFamily="34" charset="-120"/>
-              </a:rPr>
-              <a:t>} catch (SQLException e) {</a:t>
-            </a:r>
-            <a:endParaRPr lang="en-US" sz="1500" dirty="0"/>
-          </a:p>
-          <a:p>
-            <a:pPr marL="0" indent="0">
-              <a:buNone/>
-            </a:pPr>
-            <a:r>
-              <a:rPr lang="en-US" sz="1500" dirty="0">
-                <a:solidFill>
-                  <a:srgbClr val="263238"/>
-                </a:solidFill>
-                <a:latin typeface="Courier New" pitchFamily="34" charset="0"/>
-                <a:ea typeface="Courier New" pitchFamily="34" charset="-122"/>
-                <a:cs typeface="Courier New" pitchFamily="34" charset="-120"/>
-              </a:rPr>
-              <a:t>    throw new RuntimeException("Error accediendo a la base de datos", e);</a:t>
-            </a:r>
-            <a:endParaRPr lang="en-US" sz="1500" dirty="0"/>
-          </a:p>
-          <a:p>
-            <a:pPr marL="0" indent="0">
-              <a:buNone/>
-            </a:pPr>
-            <a:r>
-              <a:rPr lang="en-US" sz="1500" dirty="0">
-                <a:solidFill>
-                  <a:srgbClr val="263238"/>
-                </a:solidFill>
-                <a:latin typeface="Courier New" pitchFamily="34" charset="0"/>
-                <a:ea typeface="Courier New" pitchFamily="34" charset="-122"/>
-                <a:cs typeface="Courier New" pitchFamily="34" charset="-120"/>
-              </a:rPr>
-              <a:t>}</a:t>
-            </a:r>
-            <a:endParaRPr lang="en-US" sz="1500" dirty="0"/>
           </a:p>
         </p:txBody>
       </p:sp>
